--- a/Topic_C/Exam_Practice/TC-L01_Speaking_Workshop_People_Places_Compass_Points.pptx
+++ b/Topic_C/Exam_Practice/TC-L01_Speaking_Workshop_People_Places_Compass_Points.pptx
@@ -615,7 +615,11 @@
           <a:lstStyle/>
           <a:p>
             <a:r>
-              <a:rPr lang="en-US" dirty="0"/>
+              <a:rPr lang="ar-SA" dirty="0">
+                <a:latin typeface="Amiri" pitchFamily="2" charset="-78"/>
+                <a:ea typeface="Amiri" pitchFamily="2" charset="-78"/>
+                <a:cs typeface="Amiri" pitchFamily="2" charset="-78"/>
+              </a:rPr>
               <a:t>ROLE PLAY C (Develop) — a geography project.
 SET-UP IN THE BREAKOUT ROOM: A = examiner (reads the left column ONLY — the questions, in order), B = candidate (sees the task column; Core may use the help column), C = observer (ticks the feedback checklist). 1 minute preparation, about 3 minutes speaking, 1 minute feedback, then rotate.
 Task ! is the unexpected question: in the exam the candidate has not seen it — the examiner should read it without warning.
@@ -707,7 +711,11 @@
           <a:lstStyle/>
           <a:p>
             <a:r>
-              <a:rPr lang="en-US" dirty="0"/>
+              <a:rPr lang="ar-SA" dirty="0">
+                <a:latin typeface="Amiri" pitchFamily="2" charset="-78"/>
+                <a:ea typeface="Amiri" pitchFamily="2" charset="-78"/>
+                <a:cs typeface="Amiri" pitchFamily="2" charset="-78"/>
+              </a:rPr>
               <a:t>ROLE PLAY D (Stretch) — a global-citizenship panel.
 SET-UP IN THE BREAKOUT ROOM: A = examiner (reads the left column ONLY — the questions, in order), B = candidate (sees the task column; Core may use the help column), C = observer (ticks the feedback checklist). 1 minute preparation, about 3 minutes speaking, 1 minute feedback, then rotate.
 Task ! is the unexpected question: in the exam the candidate has not seen it — the examiner should read it without warning.
@@ -1243,7 +1251,11 @@
           <a:lstStyle/>
           <a:p>
             <a:r>
-              <a:rPr lang="en-US" dirty="0"/>
+              <a:rPr lang="ar-SA" dirty="0">
+                <a:latin typeface="Amiri" pitchFamily="2" charset="-78"/>
+                <a:ea typeface="Amiri" pitchFamily="2" charset="-78"/>
+                <a:cs typeface="Amiri" pitchFamily="2" charset="-78"/>
+              </a:rPr>
               <a:t>TOPIC CONVERSATION — Core. Examiner asks the questions in order and may add “لِمَاذَا؟ / هَلْ يُمْكِنُ أَنْ تَشْرَحَ أَكْثَرَ؟” to push for more. Candidate aims for one full sentence per question.
 </a:t>
             </a:r>
@@ -1332,7 +1344,11 @@
           <a:lstStyle/>
           <a:p>
             <a:r>
-              <a:rPr lang="en-US" dirty="0"/>
+              <a:rPr lang="ar-SA" dirty="0">
+                <a:latin typeface="Amiri" pitchFamily="2" charset="-78"/>
+                <a:ea typeface="Amiri" pitchFamily="2" charset="-78"/>
+                <a:cs typeface="Amiri" pitchFamily="2" charset="-78"/>
+              </a:rPr>
               <a:t>TOPIC CONVERSATION — Develop. Examiner asks the questions in order and may add “لِمَاذَا؟ / هَلْ يُمْكِنُ أَنْ تَشْرَحَ أَكْثَرَ؟” to push for more. Candidate aims for two or three sentences, with comparison and a past detail.
 </a:t>
             </a:r>
@@ -1421,7 +1437,11 @@
           <a:lstStyle/>
           <a:p>
             <a:r>
-              <a:rPr lang="en-US" dirty="0"/>
+              <a:rPr lang="ar-SA" dirty="0">
+                <a:latin typeface="Amiri" pitchFamily="2" charset="-78"/>
+                <a:ea typeface="Amiri" pitchFamily="2" charset="-78"/>
+                <a:cs typeface="Amiri" pitchFamily="2" charset="-78"/>
+              </a:rPr>
               <a:t>TOPIC CONVERSATION — Stretch. Examiner asks the questions in order and may add “لِمَاذَا؟ / هَلْ يُمْكِنُ أَنْ تَشْرَحَ أَكْثَرَ؟” to push for more. Candidate aims for a developed answer: opinion, comparison, concession and a conditional.
 </a:t>
             </a:r>
@@ -1510,7 +1530,11 @@
           <a:lstStyle/>
           <a:p>
             <a:r>
-              <a:rPr lang="en-US" dirty="0"/>
+              <a:rPr lang="ar-SA" dirty="0">
+                <a:latin typeface="Amiri" pitchFamily="2" charset="-78"/>
+                <a:ea typeface="Amiri" pitchFamily="2" charset="-78"/>
+                <a:cs typeface="Amiri" pitchFamily="2" charset="-78"/>
+              </a:rPr>
               <a:t>WELCOME (1 min) — while students join.
 • Greet each student by name as they arrive: السَّلَامُ عَلَيْكُمْ. Take the register (Pastoral Tracker: attendance 0/1).
 • 2-MINUTE CHECK-IN (SEND training): a private chat to any student who seemed unsettled last lesson — “Are you okay today? 👍 / 👎”.
@@ -2224,7 +2248,11 @@
           <a:lstStyle/>
           <a:p>
             <a:r>
-              <a:rPr lang="en-US" dirty="0"/>
+              <a:rPr lang="ar-SA" dirty="0">
+                <a:latin typeface="Amiri" pitchFamily="2" charset="-78"/>
+                <a:ea typeface="Amiri" pitchFamily="2" charset="-78"/>
+                <a:cs typeface="Amiri" pitchFamily="2" charset="-78"/>
+              </a:rPr>
               <a:t>TEACH (3 min). Role play = precise and complete; conversation = develop. Choral repetition of the repair phrases. To a girl: تُعِيدِي.</a:t>
             </a:r>
             <a:endParaRPr lang="en-US" dirty="0"/>
@@ -2312,7 +2340,11 @@
           <a:lstStyle/>
           <a:p>
             <a:r>
-              <a:rPr lang="en-US" dirty="0"/>
+              <a:rPr lang="ar-SA" dirty="0">
+                <a:latin typeface="Amiri" pitchFamily="2" charset="-78"/>
+                <a:ea typeface="Amiri" pitchFamily="2" charset="-78"/>
+                <a:cs typeface="Amiri" pitchFamily="2" charset="-78"/>
+              </a:rPr>
               <a:t>LANGUAGE BANK (2 min) — compass + iḍāfa: فِي شَمَالِ إِفْرِيقْيَا · فِي جَنُوبِ غَرْبِ آسْيَا. يَقَعُ for masculine places (لُبْنَانُ، العِرَاقُ), تَقَعُ for feminine (مِصْرُ، السُّعُودِيَّةُ، المُدُنُ).</a:t>
             </a:r>
             <a:endParaRPr lang="en-US" dirty="0"/>
@@ -2400,7 +2432,11 @@
           <a:lstStyle/>
           <a:p>
             <a:r>
-              <a:rPr lang="en-US" dirty="0"/>
+              <a:rPr lang="ar-SA" dirty="0">
+                <a:latin typeface="Amiri" pitchFamily="2" charset="-78"/>
+                <a:ea typeface="Amiri" pitchFamily="2" charset="-78"/>
+                <a:cs typeface="Amiri" pitchFamily="2" charset="-78"/>
+              </a:rPr>
               <a:t>LANGUAGE BANK (2 min) — the nisba: drop al- and add -iyy / -iyya: المَغْرِبُ → مَغْرِبِيٌّ / مَغْرِبِيَّةٌ. Some plurals are broken: مَغَارِبَةٌ. Countries are mostly feminine: مِصْرُ كَبِيرَةٌ.</a:t>
             </a:r>
             <a:endParaRPr lang="en-US" dirty="0"/>
@@ -2576,7 +2612,11 @@
           <a:lstStyle/>
           <a:p>
             <a:r>
-              <a:rPr lang="en-US" dirty="0"/>
+              <a:rPr lang="ar-SA" dirty="0">
+                <a:latin typeface="Amiri" pitchFamily="2" charset="-78"/>
+                <a:ea typeface="Amiri" pitchFamily="2" charset="-78"/>
+                <a:cs typeface="Amiri" pitchFamily="2" charset="-78"/>
+              </a:rPr>
               <a:t>ROLE PLAY A (Core) — an international camp.
 SET-UP IN THE BREAKOUT ROOM: A = examiner (reads the left column ONLY — the questions, in order), B = candidate (sees the task column; Core may use the help column), C = observer (ticks the feedback checklist). 1 minute preparation, about 3 minutes speaking, 1 minute feedback, then rotate.
 Task ! is the unexpected question: in the exam the candidate has not seen it — the examiner should read it without warning.
@@ -2668,7 +2708,11 @@
           <a:lstStyle/>
           <a:p>
             <a:r>
-              <a:rPr lang="en-US" dirty="0"/>
+              <a:rPr lang="ar-SA" dirty="0">
+                <a:latin typeface="Amiri" pitchFamily="2" charset="-78"/>
+                <a:ea typeface="Amiri" pitchFamily="2" charset="-78"/>
+                <a:cs typeface="Amiri" pitchFamily="2" charset="-78"/>
+              </a:rPr>
               <a:t>ROLE PLAY B (Core+) — a travel agent.
 SET-UP IN THE BREAKOUT ROOM: A = examiner (reads the left column ONLY — the questions, in order), B = candidate (sees the task column; Core may use the help column), C = observer (ticks the feedback checklist). 1 minute preparation, about 3 minutes speaking, 1 minute feedback, then rotate.
 Task ! is the unexpected question: in the exam the candidate has not seen it — the examiner should read it without warning.
@@ -3156,6 +3200,7 @@
                   <a:srgbClr val="D4AF37"/>
                 </a:solidFill>
                 <a:latin typeface="Amiri" pitchFamily="2" charset="-78"/>
+                <a:ea typeface="Amiri" pitchFamily="2" charset="-78"/>
                 <a:cs typeface="Amiri" pitchFamily="2" charset="-78"/>
               </a:rPr>
               <a:t>م</a:t>
@@ -3362,6 +3407,7 @@
                   <a:srgbClr val="D4AF37"/>
                 </a:solidFill>
                 <a:latin typeface="Amiri" pitchFamily="2" charset="-78"/>
+                <a:ea typeface="Amiri" pitchFamily="2" charset="-78"/>
                 <a:cs typeface="Amiri" pitchFamily="2" charset="-78"/>
               </a:rPr>
               <a:t>وَرْشَةُ التَّحَدُّثِ — البُلْدَانُ وَالاتِّجَاهَاتُ</a:t>
@@ -3819,6 +3865,7 @@
                   <a:srgbClr val="D4AF37"/>
                 </a:solidFill>
                 <a:latin typeface="Amiri" pitchFamily="2" charset="-78"/>
+                <a:ea typeface="Amiri" pitchFamily="2" charset="-78"/>
                 <a:cs typeface="Amiri" pitchFamily="2" charset="-78"/>
               </a:rPr>
               <a:t>م</a:t>
@@ -4139,6 +4186,7 @@
                   <a:srgbClr val="8A6D1E"/>
                 </a:solidFill>
                 <a:latin typeface="Amiri" pitchFamily="2" charset="-78"/>
+                <a:ea typeface="Amiri" pitchFamily="2" charset="-78"/>
                 <a:cs typeface="Amiri" pitchFamily="2" charset="-78"/>
               </a:rPr>
               <a:t>مَشْرُوعُ الجُغْرَافْيَا</a:t>
@@ -4419,6 +4467,7 @@
                   <a:srgbClr val="1B3B6F"/>
                 </a:solidFill>
                 <a:latin typeface="Amiri" pitchFamily="2" charset="-78"/>
+                <a:ea typeface="Amiri" pitchFamily="2" charset="-78"/>
                 <a:cs typeface="Amiri" pitchFamily="2" charset="-78"/>
               </a:rPr>
               <a:t>اخْتَرْتُ … لِأَنَّ …</a:t>
@@ -4495,6 +4544,7 @@
                   <a:srgbClr val="1B3B6F"/>
                 </a:solidFill>
                 <a:latin typeface="Amiri" pitchFamily="2" charset="-78"/>
+                <a:ea typeface="Amiri" pitchFamily="2" charset="-78"/>
                 <a:cs typeface="Amiri" pitchFamily="2" charset="-78"/>
               </a:rPr>
               <a:t>أَيَّ بَلَدٍ اخْتَرْتَ؟ وَلِمَاذَا؟</a:t>
@@ -4598,6 +4648,7 @@
                   <a:srgbClr val="1B3B6F"/>
                 </a:solidFill>
                 <a:latin typeface="Amiri" pitchFamily="2" charset="-78"/>
+                <a:ea typeface="Amiri" pitchFamily="2" charset="-78"/>
                 <a:cs typeface="Amiri" pitchFamily="2" charset="-78"/>
               </a:rPr>
               <a:t>يَقَعُ فِي … عَلَى …</a:t>
@@ -4674,6 +4725,7 @@
                   <a:srgbClr val="1B3B6F"/>
                 </a:solidFill>
                 <a:latin typeface="Amiri" pitchFamily="2" charset="-78"/>
+                <a:ea typeface="Amiri" pitchFamily="2" charset="-78"/>
                 <a:cs typeface="Amiri" pitchFamily="2" charset="-78"/>
               </a:rPr>
               <a:t>أَيْنَ يَقَعُ بِالضَّبْطِ؟</a:t>
@@ -4777,6 +4829,7 @@
                   <a:srgbClr val="1B3B6F"/>
                 </a:solidFill>
                 <a:latin typeface="Amiri" pitchFamily="2" charset="-78"/>
+                <a:ea typeface="Amiri" pitchFamily="2" charset="-78"/>
                 <a:cs typeface="Amiri" pitchFamily="2" charset="-78"/>
               </a:rPr>
               <a:t>… أَكْبَرُ مِنْ … لٰكِنَّ …</a:t>
@@ -4853,6 +4906,7 @@
                   <a:srgbClr val="1B3B6F"/>
                 </a:solidFill>
                 <a:latin typeface="Amiri" pitchFamily="2" charset="-78"/>
+                <a:ea typeface="Amiri" pitchFamily="2" charset="-78"/>
                 <a:cs typeface="Amiri" pitchFamily="2" charset="-78"/>
               </a:rPr>
               <a:t>قَارِنْهُ بِبِرِيطَانِيَا.</a:t>
@@ -4956,6 +5010,7 @@
                   <a:srgbClr val="1B3B6F"/>
                 </a:solidFill>
                 <a:latin typeface="Amiri" pitchFamily="2" charset="-78"/>
+                <a:ea typeface="Amiri" pitchFamily="2" charset="-78"/>
                 <a:cs typeface="Amiri" pitchFamily="2" charset="-78"/>
               </a:rPr>
               <a:t>يَتَكَلَّمُ المَغَارِبَةُ … وَ…</a:t>
@@ -5032,6 +5087,7 @@
                   <a:srgbClr val="1B3B6F"/>
                 </a:solidFill>
                 <a:latin typeface="Amiri" pitchFamily="2" charset="-78"/>
+                <a:ea typeface="Amiri" pitchFamily="2" charset="-78"/>
                 <a:cs typeface="Amiri" pitchFamily="2" charset="-78"/>
               </a:rPr>
               <a:t>مَا اللُّغَاتُ الَّتِي يَتَكَلَّمُهَا المَغَارِبَةُ؟</a:t>
@@ -5135,6 +5191,7 @@
                   <a:srgbClr val="1B3B6F"/>
                 </a:solidFill>
                 <a:latin typeface="Amiri" pitchFamily="2" charset="-78"/>
+                <a:ea typeface="Amiri" pitchFamily="2" charset="-78"/>
                 <a:cs typeface="Amiri" pitchFamily="2" charset="-78"/>
               </a:rPr>
               <a:t>نَعَمْ، زُرْتُ … وَرَأَيْتُ …</a:t>
@@ -5211,6 +5268,7 @@
                   <a:srgbClr val="1B3B6F"/>
                 </a:solidFill>
                 <a:latin typeface="Amiri" pitchFamily="2" charset="-78"/>
+                <a:ea typeface="Amiri" pitchFamily="2" charset="-78"/>
                 <a:cs typeface="Amiri" pitchFamily="2" charset="-78"/>
               </a:rPr>
               <a:t>هَلْ زُرْتَهُ؟ وَمَاذَا رَأَيْتَ؟</a:t>
@@ -5420,6 +5478,7 @@
                   <a:srgbClr val="D4AF37"/>
                 </a:solidFill>
                 <a:latin typeface="Amiri" pitchFamily="2" charset="-78"/>
+                <a:ea typeface="Amiri" pitchFamily="2" charset="-78"/>
                 <a:cs typeface="Amiri" pitchFamily="2" charset="-78"/>
               </a:rPr>
               <a:t>م</a:t>
@@ -5740,6 +5799,7 @@
                   <a:srgbClr val="8A6D1E"/>
                 </a:solidFill>
                 <a:latin typeface="Amiri" pitchFamily="2" charset="-78"/>
+                <a:ea typeface="Amiri" pitchFamily="2" charset="-78"/>
                 <a:cs typeface="Amiri" pitchFamily="2" charset="-78"/>
               </a:rPr>
               <a:t>لِمَاذَا نَتَعَرَّفُ عَلَى البُلْدَانِ؟</a:t>
@@ -6020,6 +6080,7 @@
                   <a:srgbClr val="1B3B6F"/>
                 </a:solidFill>
                 <a:latin typeface="Amiri" pitchFamily="2" charset="-78"/>
+                <a:ea typeface="Amiri" pitchFamily="2" charset="-78"/>
                 <a:cs typeface="Amiri" pitchFamily="2" charset="-78"/>
               </a:rPr>
               <a:t>لِأَنَّ … وَلِأَنَّ …</a:t>
@@ -6096,6 +6157,7 @@
                   <a:srgbClr val="1B3B6F"/>
                 </a:solidFill>
                 <a:latin typeface="Amiri" pitchFamily="2" charset="-78"/>
+                <a:ea typeface="Amiri" pitchFamily="2" charset="-78"/>
                 <a:cs typeface="Amiri" pitchFamily="2" charset="-78"/>
               </a:rPr>
               <a:t>لِمَاذَا يَجِبُ أَنْ يَتَعَلَّمَ الطُّلَّابُ عَنْ بُلْدَانٍ أُخْرَى؟</a:t>
@@ -6199,6 +6261,7 @@
                   <a:srgbClr val="1B3B6F"/>
                 </a:solidFill>
                 <a:latin typeface="Amiri" pitchFamily="2" charset="-78"/>
+                <a:ea typeface="Amiri" pitchFamily="2" charset="-78"/>
                 <a:cs typeface="Amiri" pitchFamily="2" charset="-78"/>
               </a:rPr>
               <a:t>كَانَ … أَمَّا اليَوْمَ فَنَرَى …</a:t>
@@ -6275,6 +6338,7 @@
                   <a:srgbClr val="1B3B6F"/>
                 </a:solidFill>
                 <a:latin typeface="Amiri" pitchFamily="2" charset="-78"/>
+                <a:ea typeface="Amiri" pitchFamily="2" charset="-78"/>
                 <a:cs typeface="Amiri" pitchFamily="2" charset="-78"/>
               </a:rPr>
               <a:t>هَلْ كَانَ النَّاسُ يَعْرِفُونَ العَالَمَ فِي المَاضِي؟</a:t>
@@ -6378,6 +6442,7 @@
                   <a:srgbClr val="1B3B6F"/>
                 </a:solidFill>
                 <a:latin typeface="Amiri" pitchFamily="2" charset="-78"/>
+                <a:ea typeface="Amiri" pitchFamily="2" charset="-78"/>
                 <a:cs typeface="Amiri" pitchFamily="2" charset="-78"/>
               </a:rPr>
               <a:t>صَحِيحٌ أَنَّ … غَيْرَ أَنَّ …</a:t>
@@ -6454,6 +6519,7 @@
                   <a:srgbClr val="1B3B6F"/>
                 </a:solidFill>
                 <a:latin typeface="Amiri" pitchFamily="2" charset="-78"/>
+                <a:ea typeface="Amiri" pitchFamily="2" charset="-78"/>
                 <a:cs typeface="Amiri" pitchFamily="2" charset="-78"/>
               </a:rPr>
               <a:t>هَلْ يَكْفِي الإِنْتَرْنِتُ لِنَعْرِفَ البُلْدَانَ؟</a:t>
@@ -6557,6 +6623,7 @@
                   <a:srgbClr val="1B3B6F"/>
                 </a:solidFill>
                 <a:latin typeface="Amiri" pitchFamily="2" charset="-78"/>
+                <a:ea typeface="Amiri" pitchFamily="2" charset="-78"/>
                 <a:cs typeface="Amiri" pitchFamily="2" charset="-78"/>
               </a:rPr>
               <a:t>عِنْدَمَا … اكْتَشَفْتُ أَنَّ …</a:t>
@@ -6633,6 +6700,7 @@
                   <a:srgbClr val="1B3B6F"/>
                 </a:solidFill>
                 <a:latin typeface="Amiri" pitchFamily="2" charset="-78"/>
+                <a:ea typeface="Amiri" pitchFamily="2" charset="-78"/>
                 <a:cs typeface="Amiri" pitchFamily="2" charset="-78"/>
               </a:rPr>
               <a:t>أَعْطِنَا مِثَالًا مِنْ تَجْرِبَتِكَ.</a:t>
@@ -6736,6 +6804,7 @@
                   <a:srgbClr val="1B3B6F"/>
                 </a:solidFill>
                 <a:latin typeface="Amiri" pitchFamily="2" charset="-78"/>
+                <a:ea typeface="Amiri" pitchFamily="2" charset="-78"/>
                 <a:cs typeface="Amiri" pitchFamily="2" charset="-78"/>
               </a:rPr>
               <a:t>لَوِ اسْتَطَعْتُ، لَعِشْتُ فِي … لِأَنَّ …</a:t>
@@ -6812,6 +6881,7 @@
                   <a:srgbClr val="1B3B6F"/>
                 </a:solidFill>
                 <a:latin typeface="Amiri" pitchFamily="2" charset="-78"/>
+                <a:ea typeface="Amiri" pitchFamily="2" charset="-78"/>
                 <a:cs typeface="Amiri" pitchFamily="2" charset="-78"/>
               </a:rPr>
               <a:t>لَوِ اسْتَطَعْتَ أَنْ تَعِيشَ فِي أَيِّ بَلَدٍ، أَيْنَ تَعِيشُ؟</a:t>
@@ -7021,6 +7091,7 @@
                   <a:srgbClr val="D4AF37"/>
                 </a:solidFill>
                 <a:latin typeface="Amiri" pitchFamily="2" charset="-78"/>
+                <a:ea typeface="Amiri" pitchFamily="2" charset="-78"/>
                 <a:cs typeface="Amiri" pitchFamily="2" charset="-78"/>
               </a:rPr>
               <a:t>م</a:t>
@@ -7341,6 +7412,7 @@
                   <a:srgbClr val="8A6D1E"/>
                 </a:solidFill>
                 <a:latin typeface="Amiri" pitchFamily="2" charset="-78"/>
+                <a:ea typeface="Amiri" pitchFamily="2" charset="-78"/>
                 <a:cs typeface="Amiri" pitchFamily="2" charset="-78"/>
               </a:rPr>
               <a:t>وَرَقَةُ المُلَاحِظِ</a:t>
@@ -8811,6 +8883,7 @@
                   <a:srgbClr val="D4AF37"/>
                 </a:solidFill>
                 <a:latin typeface="Amiri" pitchFamily="2" charset="-78"/>
+                <a:ea typeface="Amiri" pitchFamily="2" charset="-78"/>
                 <a:cs typeface="Amiri" pitchFamily="2" charset="-78"/>
               </a:rPr>
               <a:t>م</a:t>
@@ -9131,6 +9204,7 @@
                   <a:srgbClr val="8A6D1E"/>
                 </a:solidFill>
                 <a:latin typeface="Amiri" pitchFamily="2" charset="-78"/>
+                <a:ea typeface="Amiri" pitchFamily="2" charset="-78"/>
                 <a:cs typeface="Amiri" pitchFamily="2" charset="-78"/>
               </a:rPr>
               <a:t>نَمُوذَجُ الإِجَابَةِ</a:t>
@@ -9373,6 +9447,7 @@
                   <a:srgbClr val="1B3B6F"/>
                 </a:solidFill>
                 <a:latin typeface="Amiri" pitchFamily="2" charset="-78"/>
+                <a:ea typeface="Amiri" pitchFamily="2" charset="-78"/>
                 <a:cs typeface="Amiri" pitchFamily="2" charset="-78"/>
               </a:rPr>
               <a:t>أَنَا مِنْ بِرِيطَانِيَا، أَنَا بِرِيطَانِيٌّ.</a:t>
@@ -9449,6 +9524,7 @@
                   <a:srgbClr val="1B3B6F"/>
                 </a:solidFill>
                 <a:latin typeface="Amiri" pitchFamily="2" charset="-78"/>
+                <a:ea typeface="Amiri" pitchFamily="2" charset="-78"/>
                 <a:cs typeface="Amiri" pitchFamily="2" charset="-78"/>
               </a:rPr>
               <a:t>أَهْلًا! مِنْ أَيْنَ أَنْتَ؟</a:t>
@@ -9552,6 +9628,7 @@
                   <a:srgbClr val="1B3B6F"/>
                 </a:solidFill>
                 <a:latin typeface="Amiri" pitchFamily="2" charset="-78"/>
+                <a:ea typeface="Amiri" pitchFamily="2" charset="-78"/>
                 <a:cs typeface="Amiri" pitchFamily="2" charset="-78"/>
               </a:rPr>
               <a:t>أَسْكُنُ فِي مَانْشِسْتَرَ، فِي شَمَالِ غَرْبِ إِنْجِلْتِرَا.</a:t>
@@ -9628,6 +9705,7 @@
                   <a:srgbClr val="1B3B6F"/>
                 </a:solidFill>
                 <a:latin typeface="Amiri" pitchFamily="2" charset="-78"/>
+                <a:ea typeface="Amiri" pitchFamily="2" charset="-78"/>
                 <a:cs typeface="Amiri" pitchFamily="2" charset="-78"/>
               </a:rPr>
               <a:t>وَأَيْنَ تَسْكُنُ بِالضَّبْطِ؟</a:t>
@@ -9731,6 +9809,7 @@
                   <a:srgbClr val="1B3B6F"/>
                 </a:solidFill>
                 <a:latin typeface="Amiri" pitchFamily="2" charset="-78"/>
+                <a:ea typeface="Amiri" pitchFamily="2" charset="-78"/>
                 <a:cs typeface="Amiri" pitchFamily="2" charset="-78"/>
               </a:rPr>
               <a:t>نَعَمْ، زُرْتُ مِصْرَ، وَهِيَ تَقَعُ فِي شَمَالِ شَرْقِ إِفْرِيقْيَا.</a:t>
@@ -9807,6 +9886,7 @@
                   <a:srgbClr val="1B3B6F"/>
                 </a:solidFill>
                 <a:latin typeface="Amiri" pitchFamily="2" charset="-78"/>
+                <a:ea typeface="Amiri" pitchFamily="2" charset="-78"/>
                 <a:cs typeface="Amiri" pitchFamily="2" charset="-78"/>
               </a:rPr>
               <a:t>هَلْ زُرْتَ بَلَدًا عَرَبِيًّا؟</a:t>
@@ -9910,6 +9990,7 @@
                   <a:srgbClr val="1B3B6F"/>
                 </a:solidFill>
                 <a:latin typeface="Amiri" pitchFamily="2" charset="-78"/>
+                <a:ea typeface="Amiri" pitchFamily="2" charset="-78"/>
                 <a:cs typeface="Amiri" pitchFamily="2" charset="-78"/>
               </a:rPr>
               <a:t>أَهْلًا وَسَهْلًا! إِذَنْ أَنْتِ تُونِسِيَّةٌ.</a:t>
@@ -9986,6 +10067,7 @@
                   <a:srgbClr val="1B3B6F"/>
                 </a:solidFill>
                 <a:latin typeface="Amiri" pitchFamily="2" charset="-78"/>
+                <a:ea typeface="Amiri" pitchFamily="2" charset="-78"/>
                 <a:cs typeface="Amiri" pitchFamily="2" charset="-78"/>
               </a:rPr>
               <a:t>هٰذِهِ صَدِيقَتُكَ الجَدِيدَةُ مِنْ تُونِسَ.</a:t>
@@ -10089,6 +10171,7 @@
                   <a:srgbClr val="1B3B6F"/>
                 </a:solidFill>
                 <a:latin typeface="Amiri" pitchFamily="2" charset="-78"/>
+                <a:ea typeface="Amiri" pitchFamily="2" charset="-78"/>
                 <a:cs typeface="Amiri" pitchFamily="2" charset="-78"/>
               </a:rPr>
               <a:t>عَاصِمَةُ بِرِيطَانِيَا هِيَ لَنْدَنُ، وَهِيَ فِي جَنُوبِ شَرْقِ إِنْجِلْتِرَا.</a:t>
@@ -10165,6 +10248,7 @@
                   <a:srgbClr val="1B3B6F"/>
                 </a:solidFill>
                 <a:latin typeface="Amiri" pitchFamily="2" charset="-78"/>
+                <a:ea typeface="Amiri" pitchFamily="2" charset="-78"/>
                 <a:cs typeface="Amiri" pitchFamily="2" charset="-78"/>
               </a:rPr>
               <a:t>مَا عَاصِمَةُ بَلَدِكَ؟</a:t>
@@ -10374,6 +10458,7 @@
                   <a:srgbClr val="D4AF37"/>
                 </a:solidFill>
                 <a:latin typeface="Amiri" pitchFamily="2" charset="-78"/>
+                <a:ea typeface="Amiri" pitchFamily="2" charset="-78"/>
                 <a:cs typeface="Amiri" pitchFamily="2" charset="-78"/>
               </a:rPr>
               <a:t>م</a:t>
@@ -10694,6 +10779,7 @@
                   <a:srgbClr val="8A6D1E"/>
                 </a:solidFill>
                 <a:latin typeface="Amiri" pitchFamily="2" charset="-78"/>
+                <a:ea typeface="Amiri" pitchFamily="2" charset="-78"/>
                 <a:cs typeface="Amiri" pitchFamily="2" charset="-78"/>
               </a:rPr>
               <a:t>نَمُوذَجُ الإِجَابَةِ</a:t>
@@ -10936,6 +11022,7 @@
                   <a:srgbClr val="1B3B6F"/>
                 </a:solidFill>
                 <a:latin typeface="Amiri" pitchFamily="2" charset="-78"/>
+                <a:ea typeface="Amiri" pitchFamily="2" charset="-78"/>
                 <a:cs typeface="Amiri" pitchFamily="2" charset="-78"/>
               </a:rPr>
               <a:t>أُرِيدُ أَنْ أُسَافِرَ إِلَى الأُرْدُنِّ.</a:t>
@@ -11012,6 +11099,7 @@
                   <a:srgbClr val="1B3B6F"/>
                 </a:solidFill>
                 <a:latin typeface="Amiri" pitchFamily="2" charset="-78"/>
+                <a:ea typeface="Amiri" pitchFamily="2" charset="-78"/>
                 <a:cs typeface="Amiri" pitchFamily="2" charset="-78"/>
               </a:rPr>
               <a:t>إِلَى أَيِّ بَلَدٍ تُرِيدُ أَنْ تُسَافِرَ؟</a:t>
@@ -11115,6 +11203,7 @@
                   <a:srgbClr val="1B3B6F"/>
                 </a:solidFill>
                 <a:latin typeface="Amiri" pitchFamily="2" charset="-78"/>
+                <a:ea typeface="Amiri" pitchFamily="2" charset="-78"/>
                 <a:cs typeface="Amiri" pitchFamily="2" charset="-78"/>
               </a:rPr>
               <a:t>لِأَنَّ فِيهِ البَتْرَاءَ وَالبَحْرَ المَيِّتَ، وَأُحِبُّ التَّارِيخَ.</a:t>
@@ -11191,6 +11280,7 @@
                   <a:srgbClr val="1B3B6F"/>
                 </a:solidFill>
                 <a:latin typeface="Amiri" pitchFamily="2" charset="-78"/>
+                <a:ea typeface="Amiri" pitchFamily="2" charset="-78"/>
                 <a:cs typeface="Amiri" pitchFamily="2" charset="-78"/>
               </a:rPr>
               <a:t>لِمَاذَا الأُرْدُنُّ؟</a:t>
@@ -11294,6 +11384,7 @@
                   <a:srgbClr val="1B3B6F"/>
                 </a:solidFill>
                 <a:latin typeface="Amiri" pitchFamily="2" charset="-78"/>
+                <a:ea typeface="Amiri" pitchFamily="2" charset="-78"/>
                 <a:cs typeface="Amiri" pitchFamily="2" charset="-78"/>
               </a:rPr>
               <a:t>كَمْ تَبْعُدُ البَتْرَاءُ عَنْ عَمَّانَ؟</a:t>
@@ -11370,6 +11461,7 @@
                   <a:srgbClr val="1B3B6F"/>
                 </a:solidFill>
                 <a:latin typeface="Amiri" pitchFamily="2" charset="-78"/>
+                <a:ea typeface="Amiri" pitchFamily="2" charset="-78"/>
                 <a:cs typeface="Amiri" pitchFamily="2" charset="-78"/>
               </a:rPr>
               <a:t>البَتْرَاءُ فِي الجَنُوبِ، وَالبَحْرُ المَيِّتُ فِي الغَرْبِ.</a:t>
@@ -11473,6 +11565,7 @@
                   <a:srgbClr val="1B3B6F"/>
                 </a:solidFill>
                 <a:latin typeface="Amiri" pitchFamily="2" charset="-78"/>
+                <a:ea typeface="Amiri" pitchFamily="2" charset="-78"/>
                 <a:cs typeface="Amiri" pitchFamily="2" charset="-78"/>
               </a:rPr>
               <a:t>البَحْرُ المَيِّتُ أَقْرَبُ مِنَ البَتْرَاءِ، إِذَنْ سَنَزُورُهُ أَوَّلًا.</a:t>
@@ -11549,6 +11642,7 @@
                   <a:srgbClr val="1B3B6F"/>
                 </a:solidFill>
                 <a:latin typeface="Amiri" pitchFamily="2" charset="-78"/>
+                <a:ea typeface="Amiri" pitchFamily="2" charset="-78"/>
                 <a:cs typeface="Amiri" pitchFamily="2" charset="-78"/>
               </a:rPr>
               <a:t>ثَلَاثَ سَاعَاتٍ بِالسَّيَّارَةِ جَنُوبًا.</a:t>
@@ -11652,6 +11746,7 @@
                   <a:srgbClr val="1B3B6F"/>
                 </a:solidFill>
                 <a:latin typeface="Amiri" pitchFamily="2" charset="-78"/>
+                <a:ea typeface="Amiri" pitchFamily="2" charset="-78"/>
                 <a:cs typeface="Amiri" pitchFamily="2" charset="-78"/>
               </a:rPr>
               <a:t>فِي الشَّمَالِ سُورِيَا، وَفِي الشَّرْقِ العِرَاقُ، وَفِي الجَنُوبِ السُّعُودِيَّةُ.</a:t>
@@ -11728,6 +11823,7 @@
                   <a:srgbClr val="1B3B6F"/>
                 </a:solidFill>
                 <a:latin typeface="Amiri" pitchFamily="2" charset="-78"/>
+                <a:ea typeface="Amiri" pitchFamily="2" charset="-78"/>
                 <a:cs typeface="Amiri" pitchFamily="2" charset="-78"/>
               </a:rPr>
               <a:t>مَا البُلْدَانُ المُجَاوِرَةُ لِلْأُرْدُنِّ؟</a:t>
@@ -11937,6 +12033,7 @@
                   <a:srgbClr val="D4AF37"/>
                 </a:solidFill>
                 <a:latin typeface="Amiri" pitchFamily="2" charset="-78"/>
+                <a:ea typeface="Amiri" pitchFamily="2" charset="-78"/>
                 <a:cs typeface="Amiri" pitchFamily="2" charset="-78"/>
               </a:rPr>
               <a:t>م</a:t>
@@ -12257,6 +12354,7 @@
                   <a:srgbClr val="8A6D1E"/>
                 </a:solidFill>
                 <a:latin typeface="Amiri" pitchFamily="2" charset="-78"/>
+                <a:ea typeface="Amiri" pitchFamily="2" charset="-78"/>
                 <a:cs typeface="Amiri" pitchFamily="2" charset="-78"/>
               </a:rPr>
               <a:t>نَمُوذَجُ الإِجَابَةِ</a:t>
@@ -12499,6 +12597,7 @@
                   <a:srgbClr val="1B3B6F"/>
                 </a:solidFill>
                 <a:latin typeface="Amiri" pitchFamily="2" charset="-78"/>
+                <a:ea typeface="Amiri" pitchFamily="2" charset="-78"/>
                 <a:cs typeface="Amiri" pitchFamily="2" charset="-78"/>
               </a:rPr>
               <a:t>اخْتَرْتُ المَغْرِبَ، لِأَنَّ جَدَّتِي مَغْرِبِيَّةٌ، وَلِأَنَّهُ بَلَدٌ مُتَنَوِّعٌ جِدًّا.</a:t>
@@ -12575,6 +12674,7 @@
                   <a:srgbClr val="1B3B6F"/>
                 </a:solidFill>
                 <a:latin typeface="Amiri" pitchFamily="2" charset="-78"/>
+                <a:ea typeface="Amiri" pitchFamily="2" charset="-78"/>
                 <a:cs typeface="Amiri" pitchFamily="2" charset="-78"/>
               </a:rPr>
               <a:t>أَيَّ بَلَدٍ اخْتَرْتَ؟ وَلِمَاذَا؟</a:t>
@@ -12678,6 +12778,7 @@
                   <a:srgbClr val="1B3B6F"/>
                 </a:solidFill>
                 <a:latin typeface="Amiri" pitchFamily="2" charset="-78"/>
+                <a:ea typeface="Amiri" pitchFamily="2" charset="-78"/>
                 <a:cs typeface="Amiri" pitchFamily="2" charset="-78"/>
               </a:rPr>
               <a:t>يَقَعُ فِي شَمَالِ غَرْبِ إِفْرِيقْيَا، عَلَى البَحْرِ الأَبْيَضِ المُتَوَسِّطِ وَالمُحِيطِ الأَطْلَسِيِّ.</a:t>
@@ -12754,6 +12855,7 @@
                   <a:srgbClr val="1B3B6F"/>
                 </a:solidFill>
                 <a:latin typeface="Amiri" pitchFamily="2" charset="-78"/>
+                <a:ea typeface="Amiri" pitchFamily="2" charset="-78"/>
                 <a:cs typeface="Amiri" pitchFamily="2" charset="-78"/>
               </a:rPr>
               <a:t>أَيْنَ يَقَعُ بِالضَّبْطِ؟</a:t>
@@ -12857,6 +12959,7 @@
                   <a:srgbClr val="1B3B6F"/>
                 </a:solidFill>
                 <a:latin typeface="Amiri" pitchFamily="2" charset="-78"/>
+                <a:ea typeface="Amiri" pitchFamily="2" charset="-78"/>
                 <a:cs typeface="Amiri" pitchFamily="2" charset="-78"/>
               </a:rPr>
               <a:t>المَغْرِبُ أَكْبَرُ مِنْ بِرِيطَانِيَا، لٰكِنَّ عَدَدَ سُكَّانِهِ أَقَلُّ، وَجَوُّهُ أَدْفَأُ بِكَثِيرٍ.</a:t>
@@ -12933,6 +13036,7 @@
                   <a:srgbClr val="1B3B6F"/>
                 </a:solidFill>
                 <a:latin typeface="Amiri" pitchFamily="2" charset="-78"/>
+                <a:ea typeface="Amiri" pitchFamily="2" charset="-78"/>
                 <a:cs typeface="Amiri" pitchFamily="2" charset="-78"/>
               </a:rPr>
               <a:t>قَارِنْهُ بِبِرِيطَانِيَا.</a:t>
@@ -13036,6 +13140,7 @@
                   <a:srgbClr val="1B3B6F"/>
                 </a:solidFill>
                 <a:latin typeface="Amiri" pitchFamily="2" charset="-78"/>
+                <a:ea typeface="Amiri" pitchFamily="2" charset="-78"/>
                 <a:cs typeface="Amiri" pitchFamily="2" charset="-78"/>
               </a:rPr>
               <a:t>يَتَكَلَّمُ المَغَارِبَةُ العَرَبِيَّةَ وَالأَمَازِيغِيَّةَ، وَكَثِيرٌ مِنْهُمْ يَتَكَلَّمُ الفَرَنْسِيَّةَ أَيْضًا.</a:t>
@@ -13112,6 +13217,7 @@
                   <a:srgbClr val="1B3B6F"/>
                 </a:solidFill>
                 <a:latin typeface="Amiri" pitchFamily="2" charset="-78"/>
+                <a:ea typeface="Amiri" pitchFamily="2" charset="-78"/>
                 <a:cs typeface="Amiri" pitchFamily="2" charset="-78"/>
               </a:rPr>
               <a:t>مَا اللُّغَاتُ الَّتِي يَتَكَلَّمُهَا المَغَارِبَةُ؟</a:t>
@@ -13215,6 +13321,7 @@
                   <a:srgbClr val="1B3B6F"/>
                 </a:solidFill>
                 <a:latin typeface="Amiri" pitchFamily="2" charset="-78"/>
+                <a:ea typeface="Amiri" pitchFamily="2" charset="-78"/>
                 <a:cs typeface="Amiri" pitchFamily="2" charset="-78"/>
               </a:rPr>
               <a:t>نَعَمْ، زُرْتُ مَدِينَةَ فَاسَ فِي الصَّيْفِ، وَرَأَيْتُ أَقْدَمَ جَامِعَةٍ فِي العَالَمِ.</a:t>
@@ -13291,6 +13398,7 @@
                   <a:srgbClr val="1B3B6F"/>
                 </a:solidFill>
                 <a:latin typeface="Amiri" pitchFamily="2" charset="-78"/>
+                <a:ea typeface="Amiri" pitchFamily="2" charset="-78"/>
                 <a:cs typeface="Amiri" pitchFamily="2" charset="-78"/>
               </a:rPr>
               <a:t>هَلْ زُرْتَهُ؟ وَمَاذَا رَأَيْتَ؟</a:t>
@@ -13500,6 +13608,7 @@
                   <a:srgbClr val="D4AF37"/>
                 </a:solidFill>
                 <a:latin typeface="Amiri" pitchFamily="2" charset="-78"/>
+                <a:ea typeface="Amiri" pitchFamily="2" charset="-78"/>
                 <a:cs typeface="Amiri" pitchFamily="2" charset="-78"/>
               </a:rPr>
               <a:t>م</a:t>
@@ -13820,6 +13929,7 @@
                   <a:srgbClr val="8A6D1E"/>
                 </a:solidFill>
                 <a:latin typeface="Amiri" pitchFamily="2" charset="-78"/>
+                <a:ea typeface="Amiri" pitchFamily="2" charset="-78"/>
                 <a:cs typeface="Amiri" pitchFamily="2" charset="-78"/>
               </a:rPr>
               <a:t>نَمُوذَجُ الإِجَابَةِ</a:t>
@@ -14062,6 +14172,7 @@
                   <a:srgbClr val="1B3B6F"/>
                 </a:solidFill>
                 <a:latin typeface="Amiri" pitchFamily="2" charset="-78"/>
+                <a:ea typeface="Amiri" pitchFamily="2" charset="-78"/>
                 <a:cs typeface="Amiri" pitchFamily="2" charset="-78"/>
               </a:rPr>
               <a:t>لِأَنَّ العَالَمَ أَصْبَحَ قَرْيَةً صَغِيرَةً، وَلِأَنَّ فِي صَفِّنَا طُلَّابًا مِنْ أَكْثَرَ مِنْ عِشْرِينَ بَلَدًا.</a:t>
@@ -14138,6 +14249,7 @@
                   <a:srgbClr val="1B3B6F"/>
                 </a:solidFill>
                 <a:latin typeface="Amiri" pitchFamily="2" charset="-78"/>
+                <a:ea typeface="Amiri" pitchFamily="2" charset="-78"/>
                 <a:cs typeface="Amiri" pitchFamily="2" charset="-78"/>
               </a:rPr>
               <a:t>لِمَاذَا يَجِبُ أَنْ يَتَعَلَّمَ الطُّلَّابُ عَنْ بُلْدَانٍ أُخْرَى؟</a:t>
@@ -14241,6 +14353,7 @@
                   <a:srgbClr val="1B3B6F"/>
                 </a:solidFill>
                 <a:latin typeface="Amiri" pitchFamily="2" charset="-78"/>
+                <a:ea typeface="Amiri" pitchFamily="2" charset="-78"/>
                 <a:cs typeface="Amiri" pitchFamily="2" charset="-78"/>
               </a:rPr>
               <a:t>كَانَ أَغْلَبُ النَّاسِ لَا يُسَافِرُونَ أَبْعَدَ مِنْ قُرَاهُمْ، أَمَّا اليَوْمَ فَنَرَى العَالَمَ كُلَّهُ عَلَى شَاشَةِ الهَاتِفِ.</a:t>
@@ -14317,6 +14430,7 @@
                   <a:srgbClr val="1B3B6F"/>
                 </a:solidFill>
                 <a:latin typeface="Amiri" pitchFamily="2" charset="-78"/>
+                <a:ea typeface="Amiri" pitchFamily="2" charset="-78"/>
                 <a:cs typeface="Amiri" pitchFamily="2" charset="-78"/>
               </a:rPr>
               <a:t>هَلْ كَانَ النَّاسُ يَعْرِفُونَ العَالَمَ فِي المَاضِي؟</a:t>
@@ -14420,6 +14534,7 @@
                   <a:srgbClr val="1B3B6F"/>
                 </a:solidFill>
                 <a:latin typeface="Amiri" pitchFamily="2" charset="-78"/>
+                <a:ea typeface="Amiri" pitchFamily="2" charset="-78"/>
                 <a:cs typeface="Amiri" pitchFamily="2" charset="-78"/>
               </a:rPr>
               <a:t>صَحِيحٌ أَنَّهُ يُعْطِينَا مَعْلُومَاتٍ كَثِيرَةً، غَيْرَ أَنَّ السَّفَرَ وَالحَدِيثَ مَعَ النَّاسِ يُعَلِّمَانِنَا أَكْثَرَ.</a:t>
@@ -14496,6 +14611,7 @@
                   <a:srgbClr val="1B3B6F"/>
                 </a:solidFill>
                 <a:latin typeface="Amiri" pitchFamily="2" charset="-78"/>
+                <a:ea typeface="Amiri" pitchFamily="2" charset="-78"/>
                 <a:cs typeface="Amiri" pitchFamily="2" charset="-78"/>
               </a:rPr>
               <a:t>هَلْ يَكْفِي الإِنْتَرْنِتُ لِنَعْرِفَ البُلْدَانَ؟</a:t>
@@ -14599,6 +14715,7 @@
                   <a:srgbClr val="1B3B6F"/>
                 </a:solidFill>
                 <a:latin typeface="Amiri" pitchFamily="2" charset="-78"/>
+                <a:ea typeface="Amiri" pitchFamily="2" charset="-78"/>
                 <a:cs typeface="Amiri" pitchFamily="2" charset="-78"/>
               </a:rPr>
               <a:t>عِنْدَمَا زُرْتُ صَدِيقِي العُمَانِيَّ، اكْتَشَفْتُ أَنَّ عُمَانَ فِيهَا جِبَالٌ خَضْرَاءُ، لَا صَحْرَاءُ فَقَطْ كَمَا كُنْتُ أَظُنُّ.</a:t>
@@ -14675,6 +14792,7 @@
                   <a:srgbClr val="1B3B6F"/>
                 </a:solidFill>
                 <a:latin typeface="Amiri" pitchFamily="2" charset="-78"/>
+                <a:ea typeface="Amiri" pitchFamily="2" charset="-78"/>
                 <a:cs typeface="Amiri" pitchFamily="2" charset="-78"/>
               </a:rPr>
               <a:t>أَعْطِنَا مِثَالًا مِنْ تَجْرِبَتِكَ.</a:t>
@@ -14778,6 +14896,7 @@
                   <a:srgbClr val="1B3B6F"/>
                 </a:solidFill>
                 <a:latin typeface="Amiri" pitchFamily="2" charset="-78"/>
+                <a:ea typeface="Amiri" pitchFamily="2" charset="-78"/>
                 <a:cs typeface="Amiri" pitchFamily="2" charset="-78"/>
               </a:rPr>
               <a:t>لَوِ اسْتَطَعْتُ، لَعِشْتُ فِي تُونِسَ، لِأَنَّهَا تَجْمَعُ بَيْنَ البَحْرِ وَالصَّحْرَاءِ وَالتَّارِيخِ.</a:t>
@@ -14854,6 +14973,7 @@
                   <a:srgbClr val="1B3B6F"/>
                 </a:solidFill>
                 <a:latin typeface="Amiri" pitchFamily="2" charset="-78"/>
+                <a:ea typeface="Amiri" pitchFamily="2" charset="-78"/>
                 <a:cs typeface="Amiri" pitchFamily="2" charset="-78"/>
               </a:rPr>
               <a:t>لَوِ اسْتَطَعْتَ أَنْ تَعِيشَ فِي أَيِّ بَلَدٍ، أَيْنَ تَعِيشُ؟</a:t>
@@ -15063,6 +15183,7 @@
                   <a:srgbClr val="D4AF37"/>
                 </a:solidFill>
                 <a:latin typeface="Amiri" pitchFamily="2" charset="-78"/>
+                <a:ea typeface="Amiri" pitchFamily="2" charset="-78"/>
                 <a:cs typeface="Amiri" pitchFamily="2" charset="-78"/>
               </a:rPr>
               <a:t>م</a:t>
@@ -15383,6 +15504,7 @@
                   <a:srgbClr val="8A6D1E"/>
                 </a:solidFill>
                 <a:latin typeface="Amiri" pitchFamily="2" charset="-78"/>
+                <a:ea typeface="Amiri" pitchFamily="2" charset="-78"/>
                 <a:cs typeface="Amiri" pitchFamily="2" charset="-78"/>
               </a:rPr>
               <a:t>بَلَدِي وَالعَالَمُ</a:t>
@@ -15663,6 +15785,7 @@
                   <a:srgbClr val="1B3B6F"/>
                 </a:solidFill>
                 <a:latin typeface="Amiri" pitchFamily="2" charset="-78"/>
+                <a:ea typeface="Amiri" pitchFamily="2" charset="-78"/>
                 <a:cs typeface="Amiri" pitchFamily="2" charset="-78"/>
               </a:rPr>
               <a:t>أَنَا مِنْ … أَنَا …</a:t>
@@ -15739,6 +15862,7 @@
                   <a:srgbClr val="1B3B6F"/>
                 </a:solidFill>
                 <a:latin typeface="Amiri" pitchFamily="2" charset="-78"/>
+                <a:ea typeface="Amiri" pitchFamily="2" charset="-78"/>
                 <a:cs typeface="Amiri" pitchFamily="2" charset="-78"/>
               </a:rPr>
               <a:t>مِنْ أَيْنَ أَنْتَ؟</a:t>
@@ -15907,6 +16031,7 @@
                   <a:srgbClr val="1B3B6F"/>
                 </a:solidFill>
                 <a:latin typeface="Amiri" pitchFamily="2" charset="-78"/>
+                <a:ea typeface="Amiri" pitchFamily="2" charset="-78"/>
                 <a:cs typeface="Amiri" pitchFamily="2" charset="-78"/>
               </a:rPr>
               <a:t>تَقَعُ فِي … مِنْ …</a:t>
@@ -15983,6 +16108,7 @@
                   <a:srgbClr val="1B3B6F"/>
                 </a:solidFill>
                 <a:latin typeface="Amiri" pitchFamily="2" charset="-78"/>
+                <a:ea typeface="Amiri" pitchFamily="2" charset="-78"/>
                 <a:cs typeface="Amiri" pitchFamily="2" charset="-78"/>
               </a:rPr>
               <a:t>أَيْنَ تَقَعُ مَدِينَتُكَ؟</a:t>
@@ -16151,6 +16277,7 @@
                   <a:srgbClr val="1B3B6F"/>
                 </a:solidFill>
                 <a:latin typeface="Amiri" pitchFamily="2" charset="-78"/>
+                <a:ea typeface="Amiri" pitchFamily="2" charset="-78"/>
                 <a:cs typeface="Amiri" pitchFamily="2" charset="-78"/>
               </a:rPr>
               <a:t>أُحِبُّ … لِأَنَّ …</a:t>
@@ -16227,6 +16354,7 @@
                   <a:srgbClr val="1B3B6F"/>
                 </a:solidFill>
                 <a:latin typeface="Amiri" pitchFamily="2" charset="-78"/>
+                <a:ea typeface="Amiri" pitchFamily="2" charset="-78"/>
                 <a:cs typeface="Amiri" pitchFamily="2" charset="-78"/>
               </a:rPr>
               <a:t>مَا البَلَدُ العَرَبِيُّ الَّذِي تُحِبُّهُ؟</a:t>
@@ -16395,6 +16523,7 @@
                   <a:srgbClr val="1B3B6F"/>
                 </a:solidFill>
                 <a:latin typeface="Amiri" pitchFamily="2" charset="-78"/>
+                <a:ea typeface="Amiri" pitchFamily="2" charset="-78"/>
                 <a:cs typeface="Amiri" pitchFamily="2" charset="-78"/>
               </a:rPr>
               <a:t>عَاصِمَةُ مِصْرَ هِيَ …</a:t>
@@ -16471,6 +16600,7 @@
                   <a:srgbClr val="1B3B6F"/>
                 </a:solidFill>
                 <a:latin typeface="Amiri" pitchFamily="2" charset="-78"/>
+                <a:ea typeface="Amiri" pitchFamily="2" charset="-78"/>
                 <a:cs typeface="Amiri" pitchFamily="2" charset="-78"/>
               </a:rPr>
               <a:t>مَا عَاصِمَةُ مِصْرَ؟</a:t>
@@ -16639,6 +16769,7 @@
                   <a:srgbClr val="1B3B6F"/>
                 </a:solidFill>
                 <a:latin typeface="Amiri" pitchFamily="2" charset="-78"/>
+                <a:ea typeface="Amiri" pitchFamily="2" charset="-78"/>
                 <a:cs typeface="Amiri" pitchFamily="2" charset="-78"/>
               </a:rPr>
               <a:t>نَعَمْ، عِنْدِي صَدِيقٌ … وَصَدِيقَةٌ …</a:t>
@@ -16715,6 +16846,7 @@
                   <a:srgbClr val="1B3B6F"/>
                 </a:solidFill>
                 <a:latin typeface="Amiri" pitchFamily="2" charset="-78"/>
+                <a:ea typeface="Amiri" pitchFamily="2" charset="-78"/>
                 <a:cs typeface="Amiri" pitchFamily="2" charset="-78"/>
               </a:rPr>
               <a:t>هَلْ عِنْدَكَ أَصْدِقَاءُ مِنْ بُلْدَانٍ أُخْرَى؟</a:t>
@@ -16869,6 +17001,7 @@
                   <a:srgbClr val="1B3B6F"/>
                 </a:solidFill>
                 <a:latin typeface="Amiri" pitchFamily="2" charset="-78"/>
+                <a:ea typeface="Amiri" pitchFamily="2" charset="-78"/>
                 <a:cs typeface="Amiri" pitchFamily="2" charset="-78"/>
               </a:rPr>
               <a:t>عَفْوًا، هَلْ يُمْكِنُ أَنْ تُعِيدَ السُّؤَالَ؟</a:t>
@@ -17002,6 +17135,7 @@
                   <a:srgbClr val="D4AF37"/>
                 </a:solidFill>
                 <a:latin typeface="Amiri" pitchFamily="2" charset="-78"/>
+                <a:ea typeface="Amiri" pitchFamily="2" charset="-78"/>
                 <a:cs typeface="Amiri" pitchFamily="2" charset="-78"/>
               </a:rPr>
               <a:t>م</a:t>
@@ -17322,6 +17456,7 @@
                   <a:srgbClr val="8A6D1E"/>
                 </a:solidFill>
                 <a:latin typeface="Amiri" pitchFamily="2" charset="-78"/>
+                <a:ea typeface="Amiri" pitchFamily="2" charset="-78"/>
                 <a:cs typeface="Amiri" pitchFamily="2" charset="-78"/>
               </a:rPr>
               <a:t>الأَمَاكِنُ وَالنَّاسُ</a:t>
@@ -17602,6 +17737,7 @@
                   <a:srgbClr val="1B3B6F"/>
                 </a:solidFill>
                 <a:latin typeface="Amiri" pitchFamily="2" charset="-78"/>
+                <a:ea typeface="Amiri" pitchFamily="2" charset="-78"/>
                 <a:cs typeface="Amiri" pitchFamily="2" charset="-78"/>
               </a:rPr>
               <a:t>… أَكْبَرُ مِنْ … لٰكِنَّ …</a:t>
@@ -17678,6 +17814,7 @@
                   <a:srgbClr val="1B3B6F"/>
                 </a:solidFill>
                 <a:latin typeface="Amiri" pitchFamily="2" charset="-78"/>
+                <a:ea typeface="Amiri" pitchFamily="2" charset="-78"/>
                 <a:cs typeface="Amiri" pitchFamily="2" charset="-78"/>
               </a:rPr>
               <a:t>قَارِنْ بَيْنَ مَدِينَتَيْنِ تَعْرِفُهُمَا.</a:t>
@@ -17781,6 +17918,7 @@
                   <a:srgbClr val="1B3B6F"/>
                 </a:solidFill>
                 <a:latin typeface="Amiri" pitchFamily="2" charset="-78"/>
+                <a:ea typeface="Amiri" pitchFamily="2" charset="-78"/>
                 <a:cs typeface="Amiri" pitchFamily="2" charset="-78"/>
               </a:rPr>
               <a:t>سَافَرْتُ إِلَى … فِي … وَهُوَ / هِيَ تَقَعُ …</a:t>
@@ -17857,6 +17995,7 @@
                   <a:srgbClr val="1B3B6F"/>
                 </a:solidFill>
                 <a:latin typeface="Amiri" pitchFamily="2" charset="-78"/>
+                <a:ea typeface="Amiri" pitchFamily="2" charset="-78"/>
                 <a:cs typeface="Amiri" pitchFamily="2" charset="-78"/>
               </a:rPr>
               <a:t>صِفْ رِحْلَةً إِلَى بَلَدٍ آخَرَ.</a:t>
@@ -17960,6 +18099,7 @@
                   <a:srgbClr val="1B3B6F"/>
                 </a:solidFill>
                 <a:latin typeface="Amiri" pitchFamily="2" charset="-78"/>
+                <a:ea typeface="Amiri" pitchFamily="2" charset="-78"/>
                 <a:cs typeface="Amiri" pitchFamily="2" charset="-78"/>
               </a:rPr>
               <a:t>أُرِيدُ أَنْ أَزُورَ … لِأَنَّ …</a:t>
@@ -18036,6 +18176,7 @@
                   <a:srgbClr val="1B3B6F"/>
                 </a:solidFill>
                 <a:latin typeface="Amiri" pitchFamily="2" charset="-78"/>
+                <a:ea typeface="Amiri" pitchFamily="2" charset="-78"/>
                 <a:cs typeface="Amiri" pitchFamily="2" charset="-78"/>
               </a:rPr>
               <a:t>مَا البَلَدُ الَّذِي تُرِيدُ أَنْ تَزُورَهُ؟ وَلِمَاذَا؟</a:t>
@@ -18139,6 +18280,7 @@
                   <a:srgbClr val="1B3B6F"/>
                 </a:solidFill>
                 <a:latin typeface="Amiri" pitchFamily="2" charset="-78"/>
+                <a:ea typeface="Amiri" pitchFamily="2" charset="-78"/>
                 <a:cs typeface="Amiri" pitchFamily="2" charset="-78"/>
               </a:rPr>
               <a:t>نَعَمْ، لِأَنَّ … مَثَلًا …</a:t>
@@ -18215,6 +18357,7 @@
                   <a:srgbClr val="1B3B6F"/>
                 </a:solidFill>
                 <a:latin typeface="Amiri" pitchFamily="2" charset="-78"/>
+                <a:ea typeface="Amiri" pitchFamily="2" charset="-78"/>
                 <a:cs typeface="Amiri" pitchFamily="2" charset="-78"/>
               </a:rPr>
               <a:t>هَلْ مِنَ المُهِمِّ أَنْ نَعْرِفَ الجُغْرَافْيَا؟</a:t>
@@ -18318,6 +18461,7 @@
                   <a:srgbClr val="1B3B6F"/>
                 </a:solidFill>
                 <a:latin typeface="Amiri" pitchFamily="2" charset="-78"/>
+                <a:ea typeface="Amiri" pitchFamily="2" charset="-78"/>
                 <a:cs typeface="Amiri" pitchFamily="2" charset="-78"/>
               </a:rPr>
               <a:t>أَصْلُ عَائِلَتِي مِنْ … فِي شَمَالِ / جَنُوبِ …</a:t>
@@ -18394,6 +18538,7 @@
                   <a:srgbClr val="1B3B6F"/>
                 </a:solidFill>
                 <a:latin typeface="Amiri" pitchFamily="2" charset="-78"/>
+                <a:ea typeface="Amiri" pitchFamily="2" charset="-78"/>
                 <a:cs typeface="Amiri" pitchFamily="2" charset="-78"/>
               </a:rPr>
               <a:t>مِنْ أَيْنَ أَصْلُ عَائِلَتِكَ؟ صِفْ ذٰلِكَ المَكَانَ.</a:t>
@@ -18603,6 +18748,7 @@
                   <a:srgbClr val="D4AF37"/>
                 </a:solidFill>
                 <a:latin typeface="Amiri" pitchFamily="2" charset="-78"/>
+                <a:ea typeface="Amiri" pitchFamily="2" charset="-78"/>
                 <a:cs typeface="Amiri" pitchFamily="2" charset="-78"/>
               </a:rPr>
               <a:t>م</a:t>
@@ -18923,6 +19069,7 @@
                   <a:srgbClr val="8A6D1E"/>
                 </a:solidFill>
                 <a:latin typeface="Amiri" pitchFamily="2" charset="-78"/>
+                <a:ea typeface="Amiri" pitchFamily="2" charset="-78"/>
                 <a:cs typeface="Amiri" pitchFamily="2" charset="-78"/>
               </a:rPr>
               <a:t>العَالَمُ قَرْيَةٌ صَغِيرَةٌ</a:t>
@@ -19203,6 +19350,7 @@
                   <a:srgbClr val="1B3B6F"/>
                 </a:solidFill>
                 <a:latin typeface="Amiri" pitchFamily="2" charset="-78"/>
+                <a:ea typeface="Amiri" pitchFamily="2" charset="-78"/>
                 <a:cs typeface="Amiri" pitchFamily="2" charset="-78"/>
               </a:rPr>
               <a:t>إِلَى حَدٍّ كَبِيرٍ، لِأَنَّ … غَيْرَ أَنَّ …</a:t>
@@ -19279,6 +19427,7 @@
                   <a:srgbClr val="1B3B6F"/>
                 </a:solidFill>
                 <a:latin typeface="Amiri" pitchFamily="2" charset="-78"/>
+                <a:ea typeface="Amiri" pitchFamily="2" charset="-78"/>
                 <a:cs typeface="Amiri" pitchFamily="2" charset="-78"/>
               </a:rPr>
               <a:t>هَلْ أَصْبَحَ العَالَمُ «قَرْيَةً صَغِيرَةً»؟</a:t>
@@ -19382,6 +19531,7 @@
                   <a:srgbClr val="1B3B6F"/>
                 </a:solidFill>
                 <a:latin typeface="Amiri" pitchFamily="2" charset="-78"/>
+                <a:ea typeface="Amiri" pitchFamily="2" charset="-78"/>
                 <a:cs typeface="Amiri" pitchFamily="2" charset="-78"/>
               </a:rPr>
               <a:t>تَجْمَعُهَا … وَ… رَغْمَ أَنَّ …</a:t>
@@ -19458,6 +19608,7 @@
                   <a:srgbClr val="1B3B6F"/>
                 </a:solidFill>
                 <a:latin typeface="Amiri" pitchFamily="2" charset="-78"/>
+                <a:ea typeface="Amiri" pitchFamily="2" charset="-78"/>
                 <a:cs typeface="Amiri" pitchFamily="2" charset="-78"/>
               </a:rPr>
               <a:t>مَا الَّذِي يَجْمَعُ البُلْدَانَ العَرَبِيَّةَ فِي رَأْيِكَ؟</a:t>
@@ -19561,6 +19712,7 @@
                   <a:srgbClr val="1B3B6F"/>
                 </a:solidFill>
                 <a:latin typeface="Amiri" pitchFamily="2" charset="-78"/>
+                <a:ea typeface="Amiri" pitchFamily="2" charset="-78"/>
                 <a:cs typeface="Amiri" pitchFamily="2" charset="-78"/>
               </a:rPr>
               <a:t>كَانَ المُسَافِرُونَ … أَمَّا اليَوْمَ فَيُخْبِرُنَا …</a:t>
@@ -19637,6 +19789,7 @@
                   <a:srgbClr val="1B3B6F"/>
                 </a:solidFill>
                 <a:latin typeface="Amiri" pitchFamily="2" charset="-78"/>
+                <a:ea typeface="Amiri" pitchFamily="2" charset="-78"/>
                 <a:cs typeface="Amiri" pitchFamily="2" charset="-78"/>
               </a:rPr>
               <a:t>كَيْفَ تَغَيَّرَتِ الخَرَائِطُ وَطُرُقُ مَعْرِفَةِ الأَمَاكِنِ؟</a:t>
@@ -19740,6 +19893,7 @@
                   <a:srgbClr val="1B3B6F"/>
                 </a:solidFill>
                 <a:latin typeface="Amiri" pitchFamily="2" charset="-78"/>
+                <a:ea typeface="Amiri" pitchFamily="2" charset="-78"/>
                 <a:cs typeface="Amiri" pitchFamily="2" charset="-78"/>
               </a:rPr>
               <a:t>صَحِيحٌ أَنَّ … غَيْرَ أَنَّ …</a:t>
@@ -19816,6 +19970,7 @@
                   <a:srgbClr val="1B3B6F"/>
                 </a:solidFill>
                 <a:latin typeface="Amiri" pitchFamily="2" charset="-78"/>
+                <a:ea typeface="Amiri" pitchFamily="2" charset="-78"/>
                 <a:cs typeface="Amiri" pitchFamily="2" charset="-78"/>
               </a:rPr>
               <a:t>هَلِ الجِنْسِيَّةُ تُحَدِّدُ هُوِيَّةَ الإِنْسَانِ؟</a:t>
@@ -19919,6 +20074,7 @@
                   <a:srgbClr val="1B3B6F"/>
                 </a:solidFill>
                 <a:latin typeface="Amiri" pitchFamily="2" charset="-78"/>
+                <a:ea typeface="Amiri" pitchFamily="2" charset="-78"/>
                 <a:cs typeface="Amiri" pitchFamily="2" charset="-78"/>
               </a:rPr>
               <a:t>لَوْ رَسَمْتُ …، لَوَضَعْتُ …</a:t>
@@ -19995,6 +20151,7 @@
                   <a:srgbClr val="1B3B6F"/>
                 </a:solidFill>
                 <a:latin typeface="Amiri" pitchFamily="2" charset="-78"/>
+                <a:ea typeface="Amiri" pitchFamily="2" charset="-78"/>
                 <a:cs typeface="Amiri" pitchFamily="2" charset="-78"/>
               </a:rPr>
               <a:t>لَوْ رَسَمْتَ خَرِيطَةً لِحَيَاتِكَ، مَا الأَمَاكِنُ الَّتِي تَضَعُهَا؟</a:t>
@@ -20204,6 +20361,7 @@
                   <a:srgbClr val="D4AF37"/>
                 </a:solidFill>
                 <a:latin typeface="Amiri" pitchFamily="2" charset="-78"/>
+                <a:ea typeface="Amiri" pitchFamily="2" charset="-78"/>
                 <a:cs typeface="Amiri" pitchFamily="2" charset="-78"/>
               </a:rPr>
               <a:t>م</a:t>
@@ -20524,6 +20682,7 @@
                   <a:srgbClr val="8A6D1E"/>
                 </a:solidFill>
                 <a:latin typeface="Amiri" pitchFamily="2" charset="-78"/>
+                <a:ea typeface="Amiri" pitchFamily="2" charset="-78"/>
                 <a:cs typeface="Amiri" pitchFamily="2" charset="-78"/>
               </a:rPr>
               <a:t>آدَابُ الصَّفِّ</a:t>
@@ -22055,6 +22214,7 @@
                   <a:srgbClr val="D4AF37"/>
                 </a:solidFill>
                 <a:latin typeface="Amiri" pitchFamily="2" charset="-78"/>
+                <a:ea typeface="Amiri" pitchFamily="2" charset="-78"/>
                 <a:cs typeface="Amiri" pitchFamily="2" charset="-78"/>
               </a:rPr>
               <a:t>م</a:t>
@@ -22375,6 +22535,7 @@
                   <a:srgbClr val="8A6D1E"/>
                 </a:solidFill>
                 <a:latin typeface="Amiri" pitchFamily="2" charset="-78"/>
+                <a:ea typeface="Amiri" pitchFamily="2" charset="-78"/>
                 <a:cs typeface="Amiri" pitchFamily="2" charset="-78"/>
               </a:rPr>
               <a:t>نَمُوذَجُ الإِجَابَةِ</a:t>
@@ -22617,6 +22778,7 @@
                   <a:srgbClr val="1B3B6F"/>
                 </a:solidFill>
                 <a:latin typeface="Amiri" pitchFamily="2" charset="-78"/>
+                <a:ea typeface="Amiri" pitchFamily="2" charset="-78"/>
                 <a:cs typeface="Amiri" pitchFamily="2" charset="-78"/>
               </a:rPr>
               <a:t>أَنَا مِنْ لَنْدَنَ، وَأَصْلِي مِنَ العِرَاقِ.</a:t>
@@ -22693,6 +22855,7 @@
                   <a:srgbClr val="1B3B6F"/>
                 </a:solidFill>
                 <a:latin typeface="Amiri" pitchFamily="2" charset="-78"/>
+                <a:ea typeface="Amiri" pitchFamily="2" charset="-78"/>
                 <a:cs typeface="Amiri" pitchFamily="2" charset="-78"/>
               </a:rPr>
               <a:t>مِنْ أَيْنَ أَنْتَ؟</a:t>
@@ -22796,6 +22959,7 @@
                   <a:srgbClr val="1B3B6F"/>
                 </a:solidFill>
                 <a:latin typeface="Amiri" pitchFamily="2" charset="-78"/>
+                <a:ea typeface="Amiri" pitchFamily="2" charset="-78"/>
                 <a:cs typeface="Amiri" pitchFamily="2" charset="-78"/>
               </a:rPr>
               <a:t>تَقَعُ مَدِينَتِي فِي جَنُوبِ إِنْجِلْتِرَا، قَرِيبَةً مِنَ البَحْرِ.</a:t>
@@ -22872,6 +23036,7 @@
                   <a:srgbClr val="1B3B6F"/>
                 </a:solidFill>
                 <a:latin typeface="Amiri" pitchFamily="2" charset="-78"/>
+                <a:ea typeface="Amiri" pitchFamily="2" charset="-78"/>
                 <a:cs typeface="Amiri" pitchFamily="2" charset="-78"/>
               </a:rPr>
               <a:t>أَيْنَ تَقَعُ مَدِينَتُكَ؟</a:t>
@@ -22975,6 +23140,7 @@
                   <a:srgbClr val="1B3B6F"/>
                 </a:solidFill>
                 <a:latin typeface="Amiri" pitchFamily="2" charset="-78"/>
+                <a:ea typeface="Amiri" pitchFamily="2" charset="-78"/>
                 <a:cs typeface="Amiri" pitchFamily="2" charset="-78"/>
               </a:rPr>
               <a:t>أُحِبُّ لُبْنَانَ، لِأَنَّ طَبِيعَتَهُ جَمِيلَةٌ وَأَكْلَهُ لَذِيذٌ.</a:t>
@@ -23051,6 +23217,7 @@
                   <a:srgbClr val="1B3B6F"/>
                 </a:solidFill>
                 <a:latin typeface="Amiri" pitchFamily="2" charset="-78"/>
+                <a:ea typeface="Amiri" pitchFamily="2" charset="-78"/>
                 <a:cs typeface="Amiri" pitchFamily="2" charset="-78"/>
               </a:rPr>
               <a:t>مَا البَلَدُ العَرَبِيُّ الَّذِي تُحِبُّهُ؟</a:t>
@@ -23154,6 +23321,7 @@
                   <a:srgbClr val="1B3B6F"/>
                 </a:solidFill>
                 <a:latin typeface="Amiri" pitchFamily="2" charset="-78"/>
+                <a:ea typeface="Amiri" pitchFamily="2" charset="-78"/>
                 <a:cs typeface="Amiri" pitchFamily="2" charset="-78"/>
               </a:rPr>
               <a:t>عَاصِمَةُ مِصْرَ هِيَ القَاهِرَةُ، وَهِيَ عَلَى نَهْرِ النِّيلِ.</a:t>
@@ -23230,6 +23398,7 @@
                   <a:srgbClr val="1B3B6F"/>
                 </a:solidFill>
                 <a:latin typeface="Amiri" pitchFamily="2" charset="-78"/>
+                <a:ea typeface="Amiri" pitchFamily="2" charset="-78"/>
                 <a:cs typeface="Amiri" pitchFamily="2" charset="-78"/>
               </a:rPr>
               <a:t>مَا عَاصِمَةُ مِصْرَ؟</a:t>
@@ -23333,6 +23502,7 @@
                   <a:srgbClr val="1B3B6F"/>
                 </a:solidFill>
                 <a:latin typeface="Amiri" pitchFamily="2" charset="-78"/>
+                <a:ea typeface="Amiri" pitchFamily="2" charset="-78"/>
                 <a:cs typeface="Amiri" pitchFamily="2" charset="-78"/>
               </a:rPr>
               <a:t>نَعَمْ، عِنْدِي صَدِيقٌ سُورِيٌّ، وَصَدِيقَةٌ بَاكِسْتَانِيَّةٌ.</a:t>
@@ -23409,6 +23579,7 @@
                   <a:srgbClr val="1B3B6F"/>
                 </a:solidFill>
                 <a:latin typeface="Amiri" pitchFamily="2" charset="-78"/>
+                <a:ea typeface="Amiri" pitchFamily="2" charset="-78"/>
                 <a:cs typeface="Amiri" pitchFamily="2" charset="-78"/>
               </a:rPr>
               <a:t>هَلْ عِنْدَكَ أَصْدِقَاءُ مِنْ بُلْدَانٍ أُخْرَى؟</a:t>
@@ -23618,6 +23789,7 @@
                   <a:srgbClr val="D4AF37"/>
                 </a:solidFill>
                 <a:latin typeface="Amiri" pitchFamily="2" charset="-78"/>
+                <a:ea typeface="Amiri" pitchFamily="2" charset="-78"/>
                 <a:cs typeface="Amiri" pitchFamily="2" charset="-78"/>
               </a:rPr>
               <a:t>م</a:t>
@@ -23938,6 +24110,7 @@
                   <a:srgbClr val="8A6D1E"/>
                 </a:solidFill>
                 <a:latin typeface="Amiri" pitchFamily="2" charset="-78"/>
+                <a:ea typeface="Amiri" pitchFamily="2" charset="-78"/>
                 <a:cs typeface="Amiri" pitchFamily="2" charset="-78"/>
               </a:rPr>
               <a:t>نَمُوذَجُ الإِجَابَةِ</a:t>
@@ -24180,6 +24353,7 @@
                   <a:srgbClr val="1B3B6F"/>
                 </a:solidFill>
                 <a:latin typeface="Amiri" pitchFamily="2" charset="-78"/>
+                <a:ea typeface="Amiri" pitchFamily="2" charset="-78"/>
                 <a:cs typeface="Amiri" pitchFamily="2" charset="-78"/>
               </a:rPr>
               <a:t>لَنْدَنُ أَكْبَرُ مِنْ مَانْشِسْتَرَ وَأَغْلَى، لٰكِنَّ مَانْشِسْتَرَ أَهْدَأُ وَأَهْلَهَا أَكْثَرُ لُطْفًا.</a:t>
@@ -24256,6 +24430,7 @@
                   <a:srgbClr val="1B3B6F"/>
                 </a:solidFill>
                 <a:latin typeface="Amiri" pitchFamily="2" charset="-78"/>
+                <a:ea typeface="Amiri" pitchFamily="2" charset="-78"/>
                 <a:cs typeface="Amiri" pitchFamily="2" charset="-78"/>
               </a:rPr>
               <a:t>قَارِنْ بَيْنَ مَدِينَتَيْنِ تَعْرِفُهُمَا.</a:t>
@@ -24359,6 +24534,7 @@
                   <a:srgbClr val="1B3B6F"/>
                 </a:solidFill>
                 <a:latin typeface="Amiri" pitchFamily="2" charset="-78"/>
+                <a:ea typeface="Amiri" pitchFamily="2" charset="-78"/>
                 <a:cs typeface="Amiri" pitchFamily="2" charset="-78"/>
               </a:rPr>
               <a:t>سَافَرْتُ إِلَى تُرْكِيَا فِي الصَّيْفِ، وَهِيَ تَقَعُ بَيْنَ أُورُوبَّا وَآسْيَا، وَزُرْتُ إِسْطَنْبُولَ.</a:t>
@@ -24435,6 +24611,7 @@
                   <a:srgbClr val="1B3B6F"/>
                 </a:solidFill>
                 <a:latin typeface="Amiri" pitchFamily="2" charset="-78"/>
+                <a:ea typeface="Amiri" pitchFamily="2" charset="-78"/>
                 <a:cs typeface="Amiri" pitchFamily="2" charset="-78"/>
               </a:rPr>
               <a:t>صِفْ رِحْلَةً إِلَى بَلَدٍ آخَرَ.</a:t>
@@ -24538,6 +24715,7 @@
                   <a:srgbClr val="1B3B6F"/>
                 </a:solidFill>
                 <a:latin typeface="Amiri" pitchFamily="2" charset="-78"/>
+                <a:ea typeface="Amiri" pitchFamily="2" charset="-78"/>
                 <a:cs typeface="Amiri" pitchFamily="2" charset="-78"/>
               </a:rPr>
               <a:t>أُرِيدُ أَنْ أَزُورَ اليَابَانَ، لِأَنَّ ثَقَافَتَهَا مُخْتَلِفَةٌ، وَأُحِبُّ أَكْلَهَا.</a:t>
@@ -24614,6 +24792,7 @@
                   <a:srgbClr val="1B3B6F"/>
                 </a:solidFill>
                 <a:latin typeface="Amiri" pitchFamily="2" charset="-78"/>
+                <a:ea typeface="Amiri" pitchFamily="2" charset="-78"/>
                 <a:cs typeface="Amiri" pitchFamily="2" charset="-78"/>
               </a:rPr>
               <a:t>مَا البَلَدُ الَّذِي تُرِيدُ أَنْ تَزُورَهُ؟ وَلِمَاذَا؟</a:t>
@@ -24717,6 +24896,7 @@
                   <a:srgbClr val="1B3B6F"/>
                 </a:solidFill>
                 <a:latin typeface="Amiri" pitchFamily="2" charset="-78"/>
+                <a:ea typeface="Amiri" pitchFamily="2" charset="-78"/>
                 <a:cs typeface="Amiri" pitchFamily="2" charset="-78"/>
               </a:rPr>
               <a:t>نَعَمْ، لِأَنَّهَا تُسَاعِدُنَا عَلَى فَهْمِ الأَخْبَارِ؛ مَثَلًا لَا نَفْهَمُ مُشْكِلَةَ المَاءِ فِي الشَّرْقِ الأَوْسَطِ بِدُونِ خَرِيطَةٍ.</a:t>
@@ -24793,6 +24973,7 @@
                   <a:srgbClr val="1B3B6F"/>
                 </a:solidFill>
                 <a:latin typeface="Amiri" pitchFamily="2" charset="-78"/>
+                <a:ea typeface="Amiri" pitchFamily="2" charset="-78"/>
                 <a:cs typeface="Amiri" pitchFamily="2" charset="-78"/>
               </a:rPr>
               <a:t>هَلْ مِنَ المُهِمِّ أَنْ نَعْرِفَ الجُغْرَافْيَا؟</a:t>
@@ -24896,6 +25077,7 @@
                   <a:srgbClr val="1B3B6F"/>
                 </a:solidFill>
                 <a:latin typeface="Amiri" pitchFamily="2" charset="-78"/>
+                <a:ea typeface="Amiri" pitchFamily="2" charset="-78"/>
                 <a:cs typeface="Amiri" pitchFamily="2" charset="-78"/>
               </a:rPr>
               <a:t>أَصْلُ عَائِلَتِي مِنْ قَرْيَةٍ فِي جَنُوبِ لُبْنَانَ، قَرِيبَةٍ مِنَ البَحْرِ، وَفِيهَا أَشْجَارُ زَيْتُونٍ كَثِيرَةٌ.</a:t>
@@ -24972,6 +25154,7 @@
                   <a:srgbClr val="1B3B6F"/>
                 </a:solidFill>
                 <a:latin typeface="Amiri" pitchFamily="2" charset="-78"/>
+                <a:ea typeface="Amiri" pitchFamily="2" charset="-78"/>
                 <a:cs typeface="Amiri" pitchFamily="2" charset="-78"/>
               </a:rPr>
               <a:t>مِنْ أَيْنَ أَصْلُ عَائِلَتِكَ؟ صِفْ ذٰلِكَ المَكَانَ.</a:t>
@@ -25181,6 +25364,7 @@
                   <a:srgbClr val="D4AF37"/>
                 </a:solidFill>
                 <a:latin typeface="Amiri" pitchFamily="2" charset="-78"/>
+                <a:ea typeface="Amiri" pitchFamily="2" charset="-78"/>
                 <a:cs typeface="Amiri" pitchFamily="2" charset="-78"/>
               </a:rPr>
               <a:t>م</a:t>
@@ -25501,6 +25685,7 @@
                   <a:srgbClr val="8A6D1E"/>
                 </a:solidFill>
                 <a:latin typeface="Amiri" pitchFamily="2" charset="-78"/>
+                <a:ea typeface="Amiri" pitchFamily="2" charset="-78"/>
                 <a:cs typeface="Amiri" pitchFamily="2" charset="-78"/>
               </a:rPr>
               <a:t>نَمُوذَجُ الإِجَابَةِ</a:t>
@@ -25743,6 +25928,7 @@
                   <a:srgbClr val="1B3B6F"/>
                 </a:solidFill>
                 <a:latin typeface="Amiri" pitchFamily="2" charset="-78"/>
+                <a:ea typeface="Amiri" pitchFamily="2" charset="-78"/>
                 <a:cs typeface="Amiri" pitchFamily="2" charset="-78"/>
               </a:rPr>
               <a:t>إِلَى حَدٍّ كَبِيرٍ، لِأَنَّنَا نَتَوَاصَلُ مَعَ أَيِّ بَلَدٍ فِي ثَوَانٍ، غَيْرَ أَنَّ الفُرُوقَ بَيْنَ الأَغْنِيَاءِ وَالفُقَرَاءِ مَا زَالَتْ كَبِيرَةً.</a:t>
@@ -25819,6 +26005,7 @@
                   <a:srgbClr val="1B3B6F"/>
                 </a:solidFill>
                 <a:latin typeface="Amiri" pitchFamily="2" charset="-78"/>
+                <a:ea typeface="Amiri" pitchFamily="2" charset="-78"/>
                 <a:cs typeface="Amiri" pitchFamily="2" charset="-78"/>
               </a:rPr>
               <a:t>هَلْ أَصْبَحَ العَالَمُ «قَرْيَةً صَغِيرَةً»؟</a:t>
@@ -25922,6 +26109,7 @@
                   <a:srgbClr val="1B3B6F"/>
                 </a:solidFill>
                 <a:latin typeface="Amiri" pitchFamily="2" charset="-78"/>
+                <a:ea typeface="Amiri" pitchFamily="2" charset="-78"/>
                 <a:cs typeface="Amiri" pitchFamily="2" charset="-78"/>
               </a:rPr>
               <a:t>تَجْمَعُهَا اللُّغَةُ وَالتَّارِيخُ وَكَثِيرٌ مِنَ العَادَاتِ، رَغْمَ أَنَّ لِكُلِّ بَلَدٍ لَهْجَتَهُ وَأَكْلَهُ وَمَلَابِسَهُ.</a:t>
@@ -25998,6 +26186,7 @@
                   <a:srgbClr val="1B3B6F"/>
                 </a:solidFill>
                 <a:latin typeface="Amiri" pitchFamily="2" charset="-78"/>
+                <a:ea typeface="Amiri" pitchFamily="2" charset="-78"/>
                 <a:cs typeface="Amiri" pitchFamily="2" charset="-78"/>
               </a:rPr>
               <a:t>مَا الَّذِي يَجْمَعُ البُلْدَانَ العَرَبِيَّةَ فِي رَأْيِكَ؟</a:t>
@@ -26101,6 +26290,7 @@
                   <a:srgbClr val="1B3B6F"/>
                 </a:solidFill>
                 <a:latin typeface="Amiri" pitchFamily="2" charset="-78"/>
+                <a:ea typeface="Amiri" pitchFamily="2" charset="-78"/>
                 <a:cs typeface="Amiri" pitchFamily="2" charset="-78"/>
               </a:rPr>
               <a:t>كَانَ المُسَافِرُونَ يَعْتَمِدُونَ عَلَى النُّجُومِ وَالخَرَائِطِ الوَرَقِيَّةِ، أَمَّا اليَوْمَ فَيُخْبِرُنَا الهَاتِفُ بِكُلِّ مُنْعَطَفٍ.</a:t>
@@ -26177,6 +26367,7 @@
                   <a:srgbClr val="1B3B6F"/>
                 </a:solidFill>
                 <a:latin typeface="Amiri" pitchFamily="2" charset="-78"/>
+                <a:ea typeface="Amiri" pitchFamily="2" charset="-78"/>
                 <a:cs typeface="Amiri" pitchFamily="2" charset="-78"/>
               </a:rPr>
               <a:t>كَيْفَ تَغَيَّرَتِ الخَرَائِطُ وَطُرُقُ مَعْرِفَةِ الأَمَاكِنِ؟</a:t>
@@ -26386,6 +26577,7 @@
                   <a:srgbClr val="D4AF37"/>
                 </a:solidFill>
                 <a:latin typeface="Amiri" pitchFamily="2" charset="-78"/>
+                <a:ea typeface="Amiri" pitchFamily="2" charset="-78"/>
                 <a:cs typeface="Amiri" pitchFamily="2" charset="-78"/>
               </a:rPr>
               <a:t>م</a:t>
@@ -26706,6 +26898,7 @@
                   <a:srgbClr val="8A6D1E"/>
                 </a:solidFill>
                 <a:latin typeface="Amiri" pitchFamily="2" charset="-78"/>
+                <a:ea typeface="Amiri" pitchFamily="2" charset="-78"/>
                 <a:cs typeface="Amiri" pitchFamily="2" charset="-78"/>
               </a:rPr>
               <a:t>نَمُوذَجُ الإِجَابَةِ</a:t>
@@ -26948,6 +27141,7 @@
                   <a:srgbClr val="1B3B6F"/>
                 </a:solidFill>
                 <a:latin typeface="Amiri" pitchFamily="2" charset="-78"/>
+                <a:ea typeface="Amiri" pitchFamily="2" charset="-78"/>
                 <a:cs typeface="Amiri" pitchFamily="2" charset="-78"/>
               </a:rPr>
               <a:t>صَحِيحٌ أَنَّ الجِنْسِيَّةَ جُزْءٌ مِنْ هُوِيَّتِنَا، غَيْرَ أَنَّ كَثِيرًا مِنَّا يَحْمِلُ أَكْثَرَ مِنْ ثَقَافَةٍ، فَأَنَا بِرِيطَانِيٌّ وَعِرَاقِيٌّ مَعًا.</a:t>
@@ -27024,6 +27218,7 @@
                   <a:srgbClr val="1B3B6F"/>
                 </a:solidFill>
                 <a:latin typeface="Amiri" pitchFamily="2" charset="-78"/>
+                <a:ea typeface="Amiri" pitchFamily="2" charset="-78"/>
                 <a:cs typeface="Amiri" pitchFamily="2" charset="-78"/>
               </a:rPr>
               <a:t>هَلِ الجِنْسِيَّةُ تُحَدِّدُ هُوِيَّةَ الإِنْسَانِ؟</a:t>
@@ -27127,6 +27322,7 @@
                   <a:srgbClr val="1B3B6F"/>
                 </a:solidFill>
                 <a:latin typeface="Amiri" pitchFamily="2" charset="-78"/>
+                <a:ea typeface="Amiri" pitchFamily="2" charset="-78"/>
                 <a:cs typeface="Amiri" pitchFamily="2" charset="-78"/>
               </a:rPr>
               <a:t>لَوْ رَسَمْتُ خَرِيطَةً لِحَيَاتِي، لَوَضَعْتُ بَغْدَادَ فِي وَسَطِهَا، ثُمَّ لَنْدَنَ، ثُمَّ مَكَّةَ الَّتِي أَحْلُمُ بِزِيَارَتِهَا.</a:t>
@@ -27206,6 +27402,7 @@
                   <a:srgbClr val="1B3B6F"/>
                 </a:solidFill>
                 <a:latin typeface="Amiri" pitchFamily="2" charset="-78"/>
+                <a:ea typeface="Amiri" pitchFamily="2" charset="-78"/>
                 <a:cs typeface="Amiri" pitchFamily="2" charset="-78"/>
               </a:rPr>
               <a:t>لَوْ رَسَمْتَ خَرِيطَةً لِحَيَاتِكَ، مَا الأَمَاكِنُ الَّتِي تَضَعُهَا؟</a:t>
@@ -27415,6 +27612,7 @@
                   <a:srgbClr val="D4AF37"/>
                 </a:solidFill>
                 <a:latin typeface="Amiri" pitchFamily="2" charset="-78"/>
+                <a:ea typeface="Amiri" pitchFamily="2" charset="-78"/>
                 <a:cs typeface="Amiri" pitchFamily="2" charset="-78"/>
               </a:rPr>
               <a:t>م</a:t>
@@ -27735,6 +27933,7 @@
                   <a:srgbClr val="8A6D1E"/>
                 </a:solidFill>
                 <a:latin typeface="Amiri" pitchFamily="2" charset="-78"/>
+                <a:ea typeface="Amiri" pitchFamily="2" charset="-78"/>
                 <a:cs typeface="Amiri" pitchFamily="2" charset="-78"/>
               </a:rPr>
               <a:t>قَيِّمْ عَمَلَكَ</a:t>
@@ -28979,6 +29178,7 @@
                   <a:srgbClr val="FFFFFF"/>
                 </a:solidFill>
                 <a:latin typeface="Amiri" pitchFamily="2" charset="-78"/>
+                <a:ea typeface="Amiri" pitchFamily="2" charset="-78"/>
                 <a:cs typeface="Amiri" pitchFamily="2" charset="-78"/>
               </a:rPr>
               <a:t>أَحْسَنْتُمْ! إِلَى اللِّقَاءِ</a:t>
@@ -29131,6 +29331,7 @@
                   <a:srgbClr val="D4AF37"/>
                 </a:solidFill>
                 <a:latin typeface="Amiri" pitchFamily="2" charset="-78"/>
+                <a:ea typeface="Amiri" pitchFamily="2" charset="-78"/>
                 <a:cs typeface="Amiri" pitchFamily="2" charset="-78"/>
               </a:rPr>
               <a:t>وَرْشَةُ الكِتَابَةِ</a:t>
@@ -29264,6 +29465,7 @@
                   <a:srgbClr val="D4AF37"/>
                 </a:solidFill>
                 <a:latin typeface="Amiri" pitchFamily="2" charset="-78"/>
+                <a:ea typeface="Amiri" pitchFamily="2" charset="-78"/>
                 <a:cs typeface="Amiri" pitchFamily="2" charset="-78"/>
               </a:rPr>
               <a:t>م</a:t>
@@ -29584,6 +29786,7 @@
                   <a:srgbClr val="8A6D1E"/>
                 </a:solidFill>
                 <a:latin typeface="Amiri" pitchFamily="2" charset="-78"/>
+                <a:ea typeface="Amiri" pitchFamily="2" charset="-78"/>
                 <a:cs typeface="Amiri" pitchFamily="2" charset="-78"/>
               </a:rPr>
               <a:t>خَرِيطَةُ الوَرْشَةِ</a:t>
@@ -29898,6 +30101,7 @@
                   <a:srgbClr val="1B3B6F"/>
                 </a:solidFill>
                 <a:latin typeface="Amiri" pitchFamily="2" charset="-78"/>
+                <a:ea typeface="Amiri" pitchFamily="2" charset="-78"/>
                 <a:cs typeface="Amiri" pitchFamily="2" charset="-78"/>
               </a:rPr>
               <a:t>كَيْفَ</a:t>
@@ -30174,6 +30378,7 @@
                   <a:srgbClr val="1E6B52"/>
                 </a:solidFill>
                 <a:latin typeface="Amiri" pitchFamily="2" charset="-78"/>
+                <a:ea typeface="Amiri" pitchFamily="2" charset="-78"/>
                 <a:cs typeface="Amiri" pitchFamily="2" charset="-78"/>
               </a:rPr>
               <a:t>تَمْثِيلُ الدَّوْرِ</a:t>
@@ -30450,6 +30655,7 @@
                   <a:srgbClr val="8A6D1E"/>
                 </a:solidFill>
                 <a:latin typeface="Amiri" pitchFamily="2" charset="-78"/>
+                <a:ea typeface="Amiri" pitchFamily="2" charset="-78"/>
                 <a:cs typeface="Amiri" pitchFamily="2" charset="-78"/>
               </a:rPr>
               <a:t>النَّمُوذَجُ</a:t>
@@ -30726,6 +30932,7 @@
                   <a:srgbClr val="1E6B52"/>
                 </a:solidFill>
                 <a:latin typeface="Amiri" pitchFamily="2" charset="-78"/>
+                <a:ea typeface="Amiri" pitchFamily="2" charset="-78"/>
                 <a:cs typeface="Amiri" pitchFamily="2" charset="-78"/>
               </a:rPr>
               <a:t>المُحَادَثَةُ</a:t>
@@ -31002,6 +31209,7 @@
                   <a:srgbClr val="8A6D1E"/>
                 </a:solidFill>
                 <a:latin typeface="Amiri" pitchFamily="2" charset="-78"/>
+                <a:ea typeface="Amiri" pitchFamily="2" charset="-78"/>
                 <a:cs typeface="Amiri" pitchFamily="2" charset="-78"/>
               </a:rPr>
               <a:t>قَيِّمْ</a:t>
@@ -31245,6 +31453,7 @@
                   <a:srgbClr val="D4AF37"/>
                 </a:solidFill>
                 <a:latin typeface="Amiri" pitchFamily="2" charset="-78"/>
+                <a:ea typeface="Amiri" pitchFamily="2" charset="-78"/>
                 <a:cs typeface="Amiri" pitchFamily="2" charset="-78"/>
               </a:rPr>
               <a:t>م</a:t>
@@ -31565,6 +31774,7 @@
                   <a:srgbClr val="8A6D1E"/>
                 </a:solidFill>
                 <a:latin typeface="Amiri" pitchFamily="2" charset="-78"/>
+                <a:ea typeface="Amiri" pitchFamily="2" charset="-78"/>
                 <a:cs typeface="Amiri" pitchFamily="2" charset="-78"/>
               </a:rPr>
               <a:t>امْتِحَانُ التَّحَدُّثِ</a:t>
@@ -32189,6 +32399,7 @@
                   <a:srgbClr val="1B3B6F"/>
                 </a:solidFill>
                 <a:latin typeface="Amiri" pitchFamily="2" charset="-78"/>
+                <a:ea typeface="Amiri" pitchFamily="2" charset="-78"/>
                 <a:cs typeface="Amiri" pitchFamily="2" charset="-78"/>
               </a:rPr>
               <a:t>عَفْوًا، هَلْ يُمْكِنُ أَنْ تُعِيدَ السُّؤَالَ؟</a:t>
@@ -32288,6 +32499,7 @@
                   <a:srgbClr val="1B3B6F"/>
                 </a:solidFill>
                 <a:latin typeface="Amiri" pitchFamily="2" charset="-78"/>
+                <a:ea typeface="Amiri" pitchFamily="2" charset="-78"/>
                 <a:cs typeface="Amiri" pitchFamily="2" charset="-78"/>
               </a:rPr>
               <a:t>لَحْظَةً، دَعْنِي أُفَكِّرُ …</a:t>
@@ -32387,6 +32599,7 @@
                   <a:srgbClr val="1B3B6F"/>
                 </a:solidFill>
                 <a:latin typeface="Amiri" pitchFamily="2" charset="-78"/>
+                <a:ea typeface="Amiri" pitchFamily="2" charset="-78"/>
                 <a:cs typeface="Amiri" pitchFamily="2" charset="-78"/>
               </a:rPr>
               <a:t>أَقْصِدُ …</a:t>
@@ -32558,6 +32771,7 @@
                   <a:srgbClr val="D4AF37"/>
                 </a:solidFill>
                 <a:latin typeface="Amiri" pitchFamily="2" charset="-78"/>
+                <a:ea typeface="Amiri" pitchFamily="2" charset="-78"/>
                 <a:cs typeface="Amiri" pitchFamily="2" charset="-78"/>
               </a:rPr>
               <a:t>م</a:t>
@@ -32878,6 +33092,7 @@
                   <a:srgbClr val="8A6D1E"/>
                 </a:solidFill>
                 <a:latin typeface="Amiri" pitchFamily="2" charset="-78"/>
+                <a:ea typeface="Amiri" pitchFamily="2" charset="-78"/>
                 <a:cs typeface="Amiri" pitchFamily="2" charset="-78"/>
               </a:rPr>
               <a:t>أَيْنَ يَقَعُ؟</a:t>
@@ -33181,6 +33396,7 @@
                   <a:srgbClr val="1B3B6F"/>
                 </a:solidFill>
                 <a:latin typeface="Amiri" pitchFamily="2" charset="-78"/>
+                <a:ea typeface="Amiri" pitchFamily="2" charset="-78"/>
                 <a:cs typeface="Amiri" pitchFamily="2" charset="-78"/>
               </a:rPr>
               <a:t>شَمَالٌ · جَنُوبٌ</a:t>
@@ -33338,6 +33554,7 @@
                   <a:srgbClr val="1B3B6F"/>
                 </a:solidFill>
                 <a:latin typeface="Amiri" pitchFamily="2" charset="-78"/>
+                <a:ea typeface="Amiri" pitchFamily="2" charset="-78"/>
                 <a:cs typeface="Amiri" pitchFamily="2" charset="-78"/>
               </a:rPr>
               <a:t>شَمَالِيٌّ · جَنُوبِيٌّ</a:t>
@@ -33441,6 +33658,7 @@
                   <a:srgbClr val="1B3B6F"/>
                 </a:solidFill>
                 <a:latin typeface="Amiri" pitchFamily="2" charset="-78"/>
+                <a:ea typeface="Amiri" pitchFamily="2" charset="-78"/>
                 <a:cs typeface="Amiri" pitchFamily="2" charset="-78"/>
               </a:rPr>
               <a:t>فِي شَمَالِ</a:t>
@@ -33706,6 +33924,7 @@
                   <a:srgbClr val="1B3B6F"/>
                 </a:solidFill>
                 <a:latin typeface="Amiri" pitchFamily="2" charset="-78"/>
+                <a:ea typeface="Amiri" pitchFamily="2" charset="-78"/>
                 <a:cs typeface="Amiri" pitchFamily="2" charset="-78"/>
               </a:rPr>
               <a:t>شَرْقٌ · غَرْبٌ</a:t>
@@ -33863,6 +34082,7 @@
                   <a:srgbClr val="1B3B6F"/>
                 </a:solidFill>
                 <a:latin typeface="Amiri" pitchFamily="2" charset="-78"/>
+                <a:ea typeface="Amiri" pitchFamily="2" charset="-78"/>
                 <a:cs typeface="Amiri" pitchFamily="2" charset="-78"/>
               </a:rPr>
               <a:t>شَرْقِيٌّ · غَرْبِيٌّ</a:t>
@@ -33966,6 +34186,7 @@
                   <a:srgbClr val="1B3B6F"/>
                 </a:solidFill>
                 <a:latin typeface="Amiri" pitchFamily="2" charset="-78"/>
+                <a:ea typeface="Amiri" pitchFamily="2" charset="-78"/>
                 <a:cs typeface="Amiri" pitchFamily="2" charset="-78"/>
               </a:rPr>
               <a:t>فِي شَرْقِ</a:t>
@@ -34231,6 +34452,7 @@
                   <a:srgbClr val="1B3B6F"/>
                 </a:solidFill>
                 <a:latin typeface="Amiri" pitchFamily="2" charset="-78"/>
+                <a:ea typeface="Amiri" pitchFamily="2" charset="-78"/>
                 <a:cs typeface="Amiri" pitchFamily="2" charset="-78"/>
               </a:rPr>
               <a:t>بَلَدٌ</a:t>
@@ -34388,6 +34610,7 @@
                   <a:srgbClr val="1B3B6F"/>
                 </a:solidFill>
                 <a:latin typeface="Amiri" pitchFamily="2" charset="-78"/>
+                <a:ea typeface="Amiri" pitchFamily="2" charset="-78"/>
                 <a:cs typeface="Amiri" pitchFamily="2" charset="-78"/>
               </a:rPr>
               <a:t>بَلَدِي</a:t>
@@ -34491,6 +34714,7 @@
                   <a:srgbClr val="1B3B6F"/>
                 </a:solidFill>
                 <a:latin typeface="Amiri" pitchFamily="2" charset="-78"/>
+                <a:ea typeface="Amiri" pitchFamily="2" charset="-78"/>
                 <a:cs typeface="Amiri" pitchFamily="2" charset="-78"/>
               </a:rPr>
               <a:t>بُلْدَانٌ</a:t>
@@ -34594,6 +34818,7 @@
                   <a:srgbClr val="1B3B6F"/>
                 </a:solidFill>
                 <a:latin typeface="Amiri" pitchFamily="2" charset="-78"/>
+                <a:ea typeface="Amiri" pitchFamily="2" charset="-78"/>
                 <a:cs typeface="Amiri" pitchFamily="2" charset="-78"/>
               </a:rPr>
               <a:t>بَلَدٌ</a:t>
@@ -34859,6 +35084,7 @@
                   <a:srgbClr val="1B3B6F"/>
                 </a:solidFill>
                 <a:latin typeface="Amiri" pitchFamily="2" charset="-78"/>
+                <a:ea typeface="Amiri" pitchFamily="2" charset="-78"/>
                 <a:cs typeface="Amiri" pitchFamily="2" charset="-78"/>
               </a:rPr>
               <a:t>قَارَّةٌ</a:t>
@@ -35016,6 +35242,7 @@
                   <a:srgbClr val="1B3B6F"/>
                 </a:solidFill>
                 <a:latin typeface="Amiri" pitchFamily="2" charset="-78"/>
+                <a:ea typeface="Amiri" pitchFamily="2" charset="-78"/>
                 <a:cs typeface="Amiri" pitchFamily="2" charset="-78"/>
               </a:rPr>
               <a:t>قَارَّاتٌ</a:t>
@@ -35119,6 +35346,7 @@
                   <a:srgbClr val="1B3B6F"/>
                 </a:solidFill>
                 <a:latin typeface="Amiri" pitchFamily="2" charset="-78"/>
+                <a:ea typeface="Amiri" pitchFamily="2" charset="-78"/>
                 <a:cs typeface="Amiri" pitchFamily="2" charset="-78"/>
               </a:rPr>
               <a:t>قَارَّةٌ</a:t>
@@ -35384,6 +35612,7 @@
                   <a:srgbClr val="1B3B6F"/>
                 </a:solidFill>
                 <a:latin typeface="Amiri" pitchFamily="2" charset="-78"/>
+                <a:ea typeface="Amiri" pitchFamily="2" charset="-78"/>
                 <a:cs typeface="Amiri" pitchFamily="2" charset="-78"/>
               </a:rPr>
               <a:t>عَاصِمَةٌ</a:t>
@@ -35541,6 +35770,7 @@
                   <a:srgbClr val="1B3B6F"/>
                 </a:solidFill>
                 <a:latin typeface="Amiri" pitchFamily="2" charset="-78"/>
+                <a:ea typeface="Amiri" pitchFamily="2" charset="-78"/>
                 <a:cs typeface="Amiri" pitchFamily="2" charset="-78"/>
               </a:rPr>
               <a:t>عَوَاصِمُ</a:t>
@@ -35644,6 +35874,7 @@
                   <a:srgbClr val="1B3B6F"/>
                 </a:solidFill>
                 <a:latin typeface="Amiri" pitchFamily="2" charset="-78"/>
+                <a:ea typeface="Amiri" pitchFamily="2" charset="-78"/>
                 <a:cs typeface="Amiri" pitchFamily="2" charset="-78"/>
               </a:rPr>
               <a:t>عَاصِمَةٌ</a:t>
@@ -35909,6 +36140,7 @@
                   <a:srgbClr val="1B3B6F"/>
                 </a:solidFill>
                 <a:latin typeface="Amiri" pitchFamily="2" charset="-78"/>
+                <a:ea typeface="Amiri" pitchFamily="2" charset="-78"/>
                 <a:cs typeface="Amiri" pitchFamily="2" charset="-78"/>
               </a:rPr>
               <a:t>يَقَعُ · تَقَعُ</a:t>
@@ -36066,6 +36298,7 @@
                   <a:srgbClr val="1B3B6F"/>
                 </a:solidFill>
                 <a:latin typeface="Amiri" pitchFamily="2" charset="-78"/>
+                <a:ea typeface="Amiri" pitchFamily="2" charset="-78"/>
                 <a:cs typeface="Amiri" pitchFamily="2" charset="-78"/>
               </a:rPr>
               <a:t>تَقَعُ مِصْرُ</a:t>
@@ -36169,6 +36402,7 @@
                   <a:srgbClr val="1B3B6F"/>
                 </a:solidFill>
                 <a:latin typeface="Amiri" pitchFamily="2" charset="-78"/>
+                <a:ea typeface="Amiri" pitchFamily="2" charset="-78"/>
                 <a:cs typeface="Amiri" pitchFamily="2" charset="-78"/>
               </a:rPr>
               <a:t>يَقَعُ لُبْنَانُ</a:t>
@@ -36302,6 +36536,7 @@
                   <a:srgbClr val="D4AF37"/>
                 </a:solidFill>
                 <a:latin typeface="Amiri" pitchFamily="2" charset="-78"/>
+                <a:ea typeface="Amiri" pitchFamily="2" charset="-78"/>
                 <a:cs typeface="Amiri" pitchFamily="2" charset="-78"/>
               </a:rPr>
               <a:t>م</a:t>
@@ -36622,6 +36857,7 @@
                   <a:srgbClr val="8A6D1E"/>
                 </a:solidFill>
                 <a:latin typeface="Amiri" pitchFamily="2" charset="-78"/>
+                <a:ea typeface="Amiri" pitchFamily="2" charset="-78"/>
                 <a:cs typeface="Amiri" pitchFamily="2" charset="-78"/>
               </a:rPr>
               <a:t>مِنْ أَيْنَ أَنْتَ؟</a:t>
@@ -36925,6 +37161,7 @@
                   <a:srgbClr val="1B3B6F"/>
                 </a:solidFill>
                 <a:latin typeface="Amiri" pitchFamily="2" charset="-78"/>
+                <a:ea typeface="Amiri" pitchFamily="2" charset="-78"/>
                 <a:cs typeface="Amiri" pitchFamily="2" charset="-78"/>
               </a:rPr>
               <a:t>مِصْرِيٌّ</a:t>
@@ -37082,6 +37319,7 @@
                   <a:srgbClr val="1B3B6F"/>
                 </a:solidFill>
                 <a:latin typeface="Amiri" pitchFamily="2" charset="-78"/>
+                <a:ea typeface="Amiri" pitchFamily="2" charset="-78"/>
                 <a:cs typeface="Amiri" pitchFamily="2" charset="-78"/>
               </a:rPr>
               <a:t>مِصْرِيُّونَ</a:t>
@@ -37185,6 +37423,7 @@
                   <a:srgbClr val="1B3B6F"/>
                 </a:solidFill>
                 <a:latin typeface="Amiri" pitchFamily="2" charset="-78"/>
+                <a:ea typeface="Amiri" pitchFamily="2" charset="-78"/>
                 <a:cs typeface="Amiri" pitchFamily="2" charset="-78"/>
               </a:rPr>
               <a:t>مِصْرِيَّةٌ</a:t>
@@ -37288,6 +37527,7 @@
                   <a:srgbClr val="1B3B6F"/>
                 </a:solidFill>
                 <a:latin typeface="Amiri" pitchFamily="2" charset="-78"/>
+                <a:ea typeface="Amiri" pitchFamily="2" charset="-78"/>
                 <a:cs typeface="Amiri" pitchFamily="2" charset="-78"/>
               </a:rPr>
               <a:t>مِصْرِيٌّ</a:t>
@@ -37553,6 +37793,7 @@
                   <a:srgbClr val="1B3B6F"/>
                 </a:solidFill>
                 <a:latin typeface="Amiri" pitchFamily="2" charset="-78"/>
+                <a:ea typeface="Amiri" pitchFamily="2" charset="-78"/>
                 <a:cs typeface="Amiri" pitchFamily="2" charset="-78"/>
               </a:rPr>
               <a:t>مَغْرِبِيٌّ</a:t>
@@ -37710,6 +37951,7 @@
                   <a:srgbClr val="1B3B6F"/>
                 </a:solidFill>
                 <a:latin typeface="Amiri" pitchFamily="2" charset="-78"/>
+                <a:ea typeface="Amiri" pitchFamily="2" charset="-78"/>
                 <a:cs typeface="Amiri" pitchFamily="2" charset="-78"/>
               </a:rPr>
               <a:t>مَغَارِبَةٌ</a:t>
@@ -37813,6 +38055,7 @@
                   <a:srgbClr val="1B3B6F"/>
                 </a:solidFill>
                 <a:latin typeface="Amiri" pitchFamily="2" charset="-78"/>
+                <a:ea typeface="Amiri" pitchFamily="2" charset="-78"/>
                 <a:cs typeface="Amiri" pitchFamily="2" charset="-78"/>
               </a:rPr>
               <a:t>مَغْرِبِيَّةٌ</a:t>
@@ -37916,6 +38159,7 @@
                   <a:srgbClr val="1B3B6F"/>
                 </a:solidFill>
                 <a:latin typeface="Amiri" pitchFamily="2" charset="-78"/>
+                <a:ea typeface="Amiri" pitchFamily="2" charset="-78"/>
                 <a:cs typeface="Amiri" pitchFamily="2" charset="-78"/>
               </a:rPr>
               <a:t>مَغْرِبِيٌّ</a:t>
@@ -38181,6 +38425,7 @@
                   <a:srgbClr val="1B3B6F"/>
                 </a:solidFill>
                 <a:latin typeface="Amiri" pitchFamily="2" charset="-78"/>
+                <a:ea typeface="Amiri" pitchFamily="2" charset="-78"/>
                 <a:cs typeface="Amiri" pitchFamily="2" charset="-78"/>
               </a:rPr>
               <a:t>سُعُودِيٌّ</a:t>
@@ -38338,6 +38583,7 @@
                   <a:srgbClr val="1B3B6F"/>
                 </a:solidFill>
                 <a:latin typeface="Amiri" pitchFamily="2" charset="-78"/>
+                <a:ea typeface="Amiri" pitchFamily="2" charset="-78"/>
                 <a:cs typeface="Amiri" pitchFamily="2" charset="-78"/>
               </a:rPr>
               <a:t>سُعُودِيُّونَ</a:t>
@@ -38441,6 +38687,7 @@
                   <a:srgbClr val="1B3B6F"/>
                 </a:solidFill>
                 <a:latin typeface="Amiri" pitchFamily="2" charset="-78"/>
+                <a:ea typeface="Amiri" pitchFamily="2" charset="-78"/>
                 <a:cs typeface="Amiri" pitchFamily="2" charset="-78"/>
               </a:rPr>
               <a:t>سُعُودِيَّةٌ</a:t>
@@ -38544,6 +38791,7 @@
                   <a:srgbClr val="1B3B6F"/>
                 </a:solidFill>
                 <a:latin typeface="Amiri" pitchFamily="2" charset="-78"/>
+                <a:ea typeface="Amiri" pitchFamily="2" charset="-78"/>
                 <a:cs typeface="Amiri" pitchFamily="2" charset="-78"/>
               </a:rPr>
               <a:t>سُعُودِيٌّ</a:t>
@@ -38809,6 +39057,7 @@
                   <a:srgbClr val="1B3B6F"/>
                 </a:solidFill>
                 <a:latin typeface="Amiri" pitchFamily="2" charset="-78"/>
+                <a:ea typeface="Amiri" pitchFamily="2" charset="-78"/>
                 <a:cs typeface="Amiri" pitchFamily="2" charset="-78"/>
               </a:rPr>
               <a:t>عَلَى حُدُودِ …</a:t>
@@ -38966,6 +39215,7 @@
                   <a:srgbClr val="1B3B6F"/>
                 </a:solidFill>
                 <a:latin typeface="Amiri" pitchFamily="2" charset="-78"/>
+                <a:ea typeface="Amiri" pitchFamily="2" charset="-78"/>
                 <a:cs typeface="Amiri" pitchFamily="2" charset="-78"/>
               </a:rPr>
               <a:t>قَرِيبٌ مِنْ</a:t>
@@ -39069,6 +39319,7 @@
                   <a:srgbClr val="1B3B6F"/>
                 </a:solidFill>
                 <a:latin typeface="Amiri" pitchFamily="2" charset="-78"/>
+                <a:ea typeface="Amiri" pitchFamily="2" charset="-78"/>
                 <a:cs typeface="Amiri" pitchFamily="2" charset="-78"/>
               </a:rPr>
               <a:t>بَيْنَ … وَ…</a:t>
@@ -39334,6 +39585,7 @@
                   <a:srgbClr val="1B3B6F"/>
                 </a:solidFill>
                 <a:latin typeface="Amiri" pitchFamily="2" charset="-78"/>
+                <a:ea typeface="Amiri" pitchFamily="2" charset="-78"/>
                 <a:cs typeface="Amiri" pitchFamily="2" charset="-78"/>
               </a:rPr>
               <a:t>أَكْبَرُ مِنْ · أَصْغَرُ مِنْ</a:t>
@@ -39491,6 +39743,7 @@
                   <a:srgbClr val="1B3B6F"/>
                 </a:solidFill>
                 <a:latin typeface="Amiri" pitchFamily="2" charset="-78"/>
+                <a:ea typeface="Amiri" pitchFamily="2" charset="-78"/>
                 <a:cs typeface="Amiri" pitchFamily="2" charset="-78"/>
               </a:rPr>
               <a:t>أَكْبَرُ بَلَدٍ</a:t>
@@ -39756,6 +40009,7 @@
                   <a:srgbClr val="1B3B6F"/>
                 </a:solidFill>
                 <a:latin typeface="Amiri" pitchFamily="2" charset="-78"/>
+                <a:ea typeface="Amiri" pitchFamily="2" charset="-78"/>
                 <a:cs typeface="Amiri" pitchFamily="2" charset="-78"/>
               </a:rPr>
               <a:t>سُكَّانٌ</a:t>
@@ -39913,6 +40167,7 @@
                   <a:srgbClr val="1B3B6F"/>
                 </a:solidFill>
                 <a:latin typeface="Amiri" pitchFamily="2" charset="-78"/>
+                <a:ea typeface="Amiri" pitchFamily="2" charset="-78"/>
                 <a:cs typeface="Amiri" pitchFamily="2" charset="-78"/>
               </a:rPr>
               <a:t>سُكَّانُهَا</a:t>
@@ -40016,6 +40271,7 @@
                   <a:srgbClr val="1B3B6F"/>
                 </a:solidFill>
                 <a:latin typeface="Amiri" pitchFamily="2" charset="-78"/>
+                <a:ea typeface="Amiri" pitchFamily="2" charset="-78"/>
                 <a:cs typeface="Amiri" pitchFamily="2" charset="-78"/>
               </a:rPr>
               <a:t>عَدَدُ السُّكَّانِ</a:t>
@@ -40149,6 +40405,7 @@
                   <a:srgbClr val="D4AF37"/>
                 </a:solidFill>
                 <a:latin typeface="Amiri" pitchFamily="2" charset="-78"/>
+                <a:ea typeface="Amiri" pitchFamily="2" charset="-78"/>
                 <a:cs typeface="Amiri" pitchFamily="2" charset="-78"/>
               </a:rPr>
               <a:t>م</a:t>
@@ -40469,6 +40726,7 @@
                   <a:srgbClr val="8A6D1E"/>
                 </a:solidFill>
                 <a:latin typeface="Amiri" pitchFamily="2" charset="-78"/>
+                <a:ea typeface="Amiri" pitchFamily="2" charset="-78"/>
                 <a:cs typeface="Amiri" pitchFamily="2" charset="-78"/>
               </a:rPr>
               <a:t>فِي الغُرَفِ</a:t>
@@ -41645,6 +41903,7 @@
                   <a:srgbClr val="1B3B6F"/>
                 </a:solidFill>
                 <a:latin typeface="Amiri" pitchFamily="2" charset="-78"/>
+                <a:ea typeface="Amiri" pitchFamily="2" charset="-78"/>
                 <a:cs typeface="Amiri" pitchFamily="2" charset="-78"/>
               </a:rPr>
               <a:t>دَوْرُكَ!</a:t>
@@ -41721,6 +41980,7 @@
                   <a:srgbClr val="1B3B6F"/>
                 </a:solidFill>
                 <a:latin typeface="Amiri" pitchFamily="2" charset="-78"/>
+                <a:ea typeface="Amiri" pitchFamily="2" charset="-78"/>
                 <a:cs typeface="Amiri" pitchFamily="2" charset="-78"/>
               </a:rPr>
               <a:t>أَحْسَنْتَ! / أَحْسَنْتِ!</a:t>
@@ -41797,6 +42057,7 @@
                   <a:srgbClr val="1B3B6F"/>
                 </a:solidFill>
                 <a:latin typeface="Amiri" pitchFamily="2" charset="-78"/>
+                <a:ea typeface="Amiri" pitchFamily="2" charset="-78"/>
                 <a:cs typeface="Amiri" pitchFamily="2" charset="-78"/>
               </a:rPr>
               <a:t>تَكَلَّمْ أَكْثَرَ، مِنْ فَضْلِكَ</a:t>
@@ -41873,6 +42134,7 @@
                   <a:srgbClr val="1B3B6F"/>
                 </a:solidFill>
                 <a:latin typeface="Amiri" pitchFamily="2" charset="-78"/>
+                <a:ea typeface="Amiri" pitchFamily="2" charset="-78"/>
                 <a:cs typeface="Amiri" pitchFamily="2" charset="-78"/>
               </a:rPr>
               <a:t>لِمَاذَا؟</a:t>
@@ -42044,6 +42306,7 @@
                   <a:srgbClr val="D4AF37"/>
                 </a:solidFill>
                 <a:latin typeface="Amiri" pitchFamily="2" charset="-78"/>
+                <a:ea typeface="Amiri" pitchFamily="2" charset="-78"/>
                 <a:cs typeface="Amiri" pitchFamily="2" charset="-78"/>
               </a:rPr>
               <a:t>م</a:t>
@@ -42364,6 +42627,7 @@
                   <a:srgbClr val="8A6D1E"/>
                 </a:solidFill>
                 <a:latin typeface="Amiri" pitchFamily="2" charset="-78"/>
+                <a:ea typeface="Amiri" pitchFamily="2" charset="-78"/>
                 <a:cs typeface="Amiri" pitchFamily="2" charset="-78"/>
               </a:rPr>
               <a:t>فِي المُخَيَّمِ الدَّوْلِيِّ</a:t>
@@ -42644,6 +42908,7 @@
                   <a:srgbClr val="1B3B6F"/>
                 </a:solidFill>
                 <a:latin typeface="Amiri" pitchFamily="2" charset="-78"/>
+                <a:ea typeface="Amiri" pitchFamily="2" charset="-78"/>
                 <a:cs typeface="Amiri" pitchFamily="2" charset="-78"/>
               </a:rPr>
               <a:t>أَنَا مِنْ … أَنَا …</a:t>
@@ -42720,6 +42985,7 @@
                   <a:srgbClr val="1B3B6F"/>
                 </a:solidFill>
                 <a:latin typeface="Amiri" pitchFamily="2" charset="-78"/>
+                <a:ea typeface="Amiri" pitchFamily="2" charset="-78"/>
                 <a:cs typeface="Amiri" pitchFamily="2" charset="-78"/>
               </a:rPr>
               <a:t>أَهْلًا! مِنْ أَيْنَ أَنْتَ؟</a:t>
@@ -42888,6 +43154,7 @@
                   <a:srgbClr val="1B3B6F"/>
                 </a:solidFill>
                 <a:latin typeface="Amiri" pitchFamily="2" charset="-78"/>
+                <a:ea typeface="Amiri" pitchFamily="2" charset="-78"/>
                 <a:cs typeface="Amiri" pitchFamily="2" charset="-78"/>
               </a:rPr>
               <a:t>أَسْكُنُ فِي … فِي شَمَالِ / جَنُوبِ …</a:t>
@@ -42964,6 +43231,7 @@
                   <a:srgbClr val="1B3B6F"/>
                 </a:solidFill>
                 <a:latin typeface="Amiri" pitchFamily="2" charset="-78"/>
+                <a:ea typeface="Amiri" pitchFamily="2" charset="-78"/>
                 <a:cs typeface="Amiri" pitchFamily="2" charset="-78"/>
               </a:rPr>
               <a:t>وَأَيْنَ تَسْكُنُ بِالضَّبْطِ؟</a:t>
@@ -43132,6 +43400,7 @@
                   <a:srgbClr val="1B3B6F"/>
                 </a:solidFill>
                 <a:latin typeface="Amiri" pitchFamily="2" charset="-78"/>
+                <a:ea typeface="Amiri" pitchFamily="2" charset="-78"/>
                 <a:cs typeface="Amiri" pitchFamily="2" charset="-78"/>
               </a:rPr>
               <a:t>نَعَمْ، زُرْتُ … وَهِيَ تَقَعُ فِي …</a:t>
@@ -43208,6 +43477,7 @@
                   <a:srgbClr val="1B3B6F"/>
                 </a:solidFill>
                 <a:latin typeface="Amiri" pitchFamily="2" charset="-78"/>
+                <a:ea typeface="Amiri" pitchFamily="2" charset="-78"/>
                 <a:cs typeface="Amiri" pitchFamily="2" charset="-78"/>
               </a:rPr>
               <a:t>هَلْ زُرْتَ بَلَدًا عَرَبِيًّا؟</a:t>
@@ -43376,6 +43646,7 @@
                   <a:srgbClr val="1B3B6F"/>
                 </a:solidFill>
                 <a:latin typeface="Amiri" pitchFamily="2" charset="-78"/>
+                <a:ea typeface="Amiri" pitchFamily="2" charset="-78"/>
                 <a:cs typeface="Amiri" pitchFamily="2" charset="-78"/>
               </a:rPr>
               <a:t>أَهْلًا! أَنْتِ …</a:t>
@@ -43452,6 +43723,7 @@
                   <a:srgbClr val="1B3B6F"/>
                 </a:solidFill>
                 <a:latin typeface="Amiri" pitchFamily="2" charset="-78"/>
+                <a:ea typeface="Amiri" pitchFamily="2" charset="-78"/>
                 <a:cs typeface="Amiri" pitchFamily="2" charset="-78"/>
               </a:rPr>
               <a:t>هٰذِهِ صَدِيقَتُكَ الجَدِيدَةُ مِنْ تُونِسَ.</a:t>
@@ -43620,6 +43892,7 @@
                   <a:srgbClr val="1B3B6F"/>
                 </a:solidFill>
                 <a:latin typeface="Amiri" pitchFamily="2" charset="-78"/>
+                <a:ea typeface="Amiri" pitchFamily="2" charset="-78"/>
                 <a:cs typeface="Amiri" pitchFamily="2" charset="-78"/>
               </a:rPr>
               <a:t>عَاصِمَةُ … هِيَ …</a:t>
@@ -43696,6 +43969,7 @@
                   <a:srgbClr val="1B3B6F"/>
                 </a:solidFill>
                 <a:latin typeface="Amiri" pitchFamily="2" charset="-78"/>
+                <a:ea typeface="Amiri" pitchFamily="2" charset="-78"/>
                 <a:cs typeface="Amiri" pitchFamily="2" charset="-78"/>
               </a:rPr>
               <a:t>مَا عَاصِمَةُ بَلَدِكَ؟</a:t>
@@ -43970,6 +44244,7 @@
                   <a:srgbClr val="D4AF37"/>
                 </a:solidFill>
                 <a:latin typeface="Amiri" pitchFamily="2" charset="-78"/>
+                <a:ea typeface="Amiri" pitchFamily="2" charset="-78"/>
                 <a:cs typeface="Amiri" pitchFamily="2" charset="-78"/>
               </a:rPr>
               <a:t>م</a:t>
@@ -44290,6 +44565,7 @@
                   <a:srgbClr val="8A6D1E"/>
                 </a:solidFill>
                 <a:latin typeface="Amiri" pitchFamily="2" charset="-78"/>
+                <a:ea typeface="Amiri" pitchFamily="2" charset="-78"/>
                 <a:cs typeface="Amiri" pitchFamily="2" charset="-78"/>
               </a:rPr>
               <a:t>فِي وَكَالَةِ السَّفَرِ</a:t>
@@ -44570,6 +44846,7 @@
                   <a:srgbClr val="1B3B6F"/>
                 </a:solidFill>
                 <a:latin typeface="Amiri" pitchFamily="2" charset="-78"/>
+                <a:ea typeface="Amiri" pitchFamily="2" charset="-78"/>
                 <a:cs typeface="Amiri" pitchFamily="2" charset="-78"/>
               </a:rPr>
               <a:t>أُرِيدُ أَنْ أُسَافِرَ إِلَى …</a:t>
@@ -44646,6 +44923,7 @@
                   <a:srgbClr val="1B3B6F"/>
                 </a:solidFill>
                 <a:latin typeface="Amiri" pitchFamily="2" charset="-78"/>
+                <a:ea typeface="Amiri" pitchFamily="2" charset="-78"/>
                 <a:cs typeface="Amiri" pitchFamily="2" charset="-78"/>
               </a:rPr>
               <a:t>إِلَى أَيِّ بَلَدٍ تُرِيدُ أَنْ تُسَافِرَ؟</a:t>
@@ -44814,6 +45092,7 @@
                   <a:srgbClr val="1B3B6F"/>
                 </a:solidFill>
                 <a:latin typeface="Amiri" pitchFamily="2" charset="-78"/>
+                <a:ea typeface="Amiri" pitchFamily="2" charset="-78"/>
                 <a:cs typeface="Amiri" pitchFamily="2" charset="-78"/>
               </a:rPr>
               <a:t>لِأَنَّ … فِيهِ …</a:t>
@@ -44890,6 +45169,7 @@
                   <a:srgbClr val="1B3B6F"/>
                 </a:solidFill>
                 <a:latin typeface="Amiri" pitchFamily="2" charset="-78"/>
+                <a:ea typeface="Amiri" pitchFamily="2" charset="-78"/>
                 <a:cs typeface="Amiri" pitchFamily="2" charset="-78"/>
               </a:rPr>
               <a:t>لِمَاذَا الأُرْدُنُّ؟</a:t>
@@ -45058,6 +45338,7 @@
                   <a:srgbClr val="1B3B6F"/>
                 </a:solidFill>
                 <a:latin typeface="Amiri" pitchFamily="2" charset="-78"/>
+                <a:ea typeface="Amiri" pitchFamily="2" charset="-78"/>
                 <a:cs typeface="Amiri" pitchFamily="2" charset="-78"/>
               </a:rPr>
               <a:t>كَمْ تَبْعُدُ … عَنْ …؟</a:t>
@@ -45134,6 +45415,7 @@
                   <a:srgbClr val="1B3B6F"/>
                 </a:solidFill>
                 <a:latin typeface="Amiri" pitchFamily="2" charset="-78"/>
+                <a:ea typeface="Amiri" pitchFamily="2" charset="-78"/>
                 <a:cs typeface="Amiri" pitchFamily="2" charset="-78"/>
               </a:rPr>
               <a:t>البَتْرَاءُ فِي الجَنُوبِ، وَالبَحْرُ المَيِّتُ فِي الغَرْبِ.</a:t>
@@ -45237,6 +45519,7 @@
                   <a:srgbClr val="1B3B6F"/>
                 </a:solidFill>
                 <a:latin typeface="Amiri" pitchFamily="2" charset="-78"/>
+                <a:ea typeface="Amiri" pitchFamily="2" charset="-78"/>
                 <a:cs typeface="Amiri" pitchFamily="2" charset="-78"/>
               </a:rPr>
               <a:t>… أَقْرَبُ مِنْ … إِذَنْ …</a:t>
@@ -45313,6 +45596,7 @@
                   <a:srgbClr val="1B3B6F"/>
                 </a:solidFill>
                 <a:latin typeface="Amiri" pitchFamily="2" charset="-78"/>
+                <a:ea typeface="Amiri" pitchFamily="2" charset="-78"/>
                 <a:cs typeface="Amiri" pitchFamily="2" charset="-78"/>
               </a:rPr>
               <a:t>ثَلَاثَ سَاعَاتٍ بِالسَّيَّارَةِ جَنُوبًا.</a:t>
@@ -45416,6 +45700,7 @@
                   <a:srgbClr val="1B3B6F"/>
                 </a:solidFill>
                 <a:latin typeface="Amiri" pitchFamily="2" charset="-78"/>
+                <a:ea typeface="Amiri" pitchFamily="2" charset="-78"/>
                 <a:cs typeface="Amiri" pitchFamily="2" charset="-78"/>
               </a:rPr>
               <a:t>فِي الشَّمَالِ … وَفِي الشَّرْقِ …</a:t>
@@ -45492,6 +45777,7 @@
                   <a:srgbClr val="1B3B6F"/>
                 </a:solidFill>
                 <a:latin typeface="Amiri" pitchFamily="2" charset="-78"/>
+                <a:ea typeface="Amiri" pitchFamily="2" charset="-78"/>
                 <a:cs typeface="Amiri" pitchFamily="2" charset="-78"/>
               </a:rPr>
               <a:t>مَا البُلْدَانُ المُجَاوِرَةُ لِلْأُرْدُنِّ؟</a:t>
@@ -45666,13 +45952,9 @@
     <a:fontScheme name="Office">
       <a:majorFont>
         <a:latin typeface="Calibri Light" panose="020F0302020204030204"/>
-        <a:ea typeface=""/>
-        <a:cs typeface=""/>
-        <a:font script="Jpan" typeface="游ゴシック Light"/>
-        <a:font script="Hang" typeface="맑은 고딕"/>
-        <a:font script="Hans" typeface="等线 Light"/>
-        <a:font script="Hant" typeface="新細明體"/>
-        <a:font script="Arab" typeface="Times New Roman"/>
+        <a:ea typeface="Amiri" pitchFamily="2" charset="-78"/>
+        <a:cs typeface="Amiri" pitchFamily="2" charset="-78"/>
+        <a:font script="Arab" typeface="Amiri"/>
         <a:font script="Hebr" typeface="Times New Roman"/>
         <a:font script="Thai" typeface="Angsana New"/>
         <a:font script="Ethi" typeface="Nyala"/>
@@ -45718,13 +46000,9 @@
       </a:majorFont>
       <a:minorFont>
         <a:latin typeface="Calibri" panose="020F0502020204030204"/>
-        <a:ea typeface=""/>
-        <a:cs typeface=""/>
-        <a:font script="Jpan" typeface="游ゴシック"/>
-        <a:font script="Hang" typeface="맑은 고딕"/>
-        <a:font script="Hans" typeface="等线"/>
-        <a:font script="Hant" typeface="新細明體"/>
-        <a:font script="Arab" typeface="Arial"/>
+        <a:ea typeface="Amiri" pitchFamily="2" charset="-78"/>
+        <a:cs typeface="Amiri" pitchFamily="2" charset="-78"/>
+        <a:font script="Arab" typeface="Amiri"/>
         <a:font script="Hebr" typeface="Arial"/>
         <a:font script="Thai" typeface="Cordia New"/>
         <a:font script="Ethi" typeface="Nyala"/>
